--- a/docs/plots/grant/jx_grant_linsubhr_diff_anemia2.pptx
+++ b/docs/plots/grant/jx_grant_linsubhr_diff_anemia2.pptx
@@ -2271,7 +2271,7 @@
           </p:nvSpPr>
           <p:spPr>
             <a:xfrm>
-              <a:off x="915645" y="5038294"/>
+              <a:off x="915645" y="5067975"/>
               <a:ext cx="7682587" cy="0"/>
             </a:xfrm>
             <a:custGeom>
@@ -2314,7 +2314,7 @@
           </p:nvSpPr>
           <p:spPr>
             <a:xfrm>
-              <a:off x="915645" y="4273666"/>
+              <a:off x="915645" y="4288924"/>
               <a:ext cx="7682587" cy="0"/>
             </a:xfrm>
             <a:custGeom>
@@ -2357,7 +2357,7 @@
           </p:nvSpPr>
           <p:spPr>
             <a:xfrm>
-              <a:off x="915645" y="3509037"/>
+              <a:off x="915645" y="3509873"/>
               <a:ext cx="7682587" cy="0"/>
             </a:xfrm>
             <a:custGeom>
@@ -2400,7 +2400,7 @@
           </p:nvSpPr>
           <p:spPr>
             <a:xfrm>
-              <a:off x="915645" y="2744409"/>
+              <a:off x="915645" y="2730822"/>
               <a:ext cx="7682587" cy="0"/>
             </a:xfrm>
             <a:custGeom>
@@ -2443,15 +2443,15 @@
           </p:nvSpPr>
           <p:spPr>
             <a:xfrm>
-              <a:off x="1701364" y="2209169"/>
-              <a:ext cx="0" cy="3364365"/>
+              <a:off x="1264853" y="2185486"/>
+              <a:ext cx="0" cy="3427824"/>
             </a:xfrm>
             <a:custGeom>
               <a:avLst/>
               <a:pathLst>
-                <a:path w="0" h="3364365">
+                <a:path w="0" h="3427824">
                   <a:moveTo>
-                    <a:pt x="0" y="3364365"/>
+                    <a:pt x="0" y="3427824"/>
                   </a:moveTo>
                   <a:lnTo>
                     <a:pt x="0" y="0"/>
@@ -2486,15 +2486,15 @@
           </p:nvSpPr>
           <p:spPr>
             <a:xfrm>
-              <a:off x="3447406" y="2209169"/>
-              <a:ext cx="0" cy="3364365"/>
+              <a:off x="2137874" y="2185486"/>
+              <a:ext cx="0" cy="3427824"/>
             </a:xfrm>
             <a:custGeom>
               <a:avLst/>
               <a:pathLst>
-                <a:path w="0" h="3364365">
+                <a:path w="0" h="3427824">
                   <a:moveTo>
-                    <a:pt x="0" y="3364365"/>
+                    <a:pt x="0" y="3427824"/>
                   </a:moveTo>
                   <a:lnTo>
                     <a:pt x="0" y="0"/>
@@ -2529,15 +2529,15 @@
           </p:nvSpPr>
           <p:spPr>
             <a:xfrm>
-              <a:off x="5193449" y="2209169"/>
-              <a:ext cx="0" cy="3364365"/>
+              <a:off x="3010896" y="2185486"/>
+              <a:ext cx="0" cy="3427824"/>
             </a:xfrm>
             <a:custGeom>
               <a:avLst/>
               <a:pathLst>
-                <a:path w="0" h="3364365">
+                <a:path w="0" h="3427824">
                   <a:moveTo>
-                    <a:pt x="0" y="3364365"/>
+                    <a:pt x="0" y="3427824"/>
                   </a:moveTo>
                   <a:lnTo>
                     <a:pt x="0" y="0"/>
@@ -2572,15 +2572,15 @@
           </p:nvSpPr>
           <p:spPr>
             <a:xfrm>
-              <a:off x="6939491" y="2209169"/>
-              <a:ext cx="0" cy="3364365"/>
+              <a:off x="3883917" y="2185486"/>
+              <a:ext cx="0" cy="3427824"/>
             </a:xfrm>
             <a:custGeom>
               <a:avLst/>
               <a:pathLst>
-                <a:path w="0" h="3364365">
+                <a:path w="0" h="3427824">
                   <a:moveTo>
-                    <a:pt x="0" y="3364365"/>
+                    <a:pt x="0" y="3427824"/>
                   </a:moveTo>
                   <a:lnTo>
                     <a:pt x="0" y="0"/>
@@ -2615,26 +2615,26 @@
           </p:nvSpPr>
           <p:spPr>
             <a:xfrm>
-              <a:off x="915645" y="5420609"/>
-              <a:ext cx="7682587" cy="0"/>
+              <a:off x="4756938" y="2185486"/>
+              <a:ext cx="0" cy="3427824"/>
             </a:xfrm>
             <a:custGeom>
               <a:avLst/>
               <a:pathLst>
-                <a:path w="7682587" h="0">
+                <a:path w="0" h="3427824">
                   <a:moveTo>
+                    <a:pt x="0" y="3427824"/>
+                  </a:moveTo>
+                  <a:lnTo>
                     <a:pt x="0" y="0"/>
-                  </a:moveTo>
-                  <a:lnTo>
-                    <a:pt x="7682587" y="0"/>
-                  </a:lnTo>
-                  <a:lnTo>
-                    <a:pt x="7682587" y="0"/>
+                  </a:lnTo>
+                  <a:lnTo>
+                    <a:pt x="0" y="0"/>
                   </a:lnTo>
                 </a:path>
               </a:pathLst>
             </a:custGeom>
-            <a:ln w="17246" cap="flat">
+            <a:ln w="8623" cap="flat">
               <a:solidFill>
                 <a:srgbClr val="EBEBEB">
                   <a:alpha val="100000"/>
@@ -2658,26 +2658,26 @@
           </p:nvSpPr>
           <p:spPr>
             <a:xfrm>
-              <a:off x="915645" y="4655980"/>
-              <a:ext cx="7682587" cy="0"/>
+              <a:off x="5629959" y="2185486"/>
+              <a:ext cx="0" cy="3427824"/>
             </a:xfrm>
             <a:custGeom>
               <a:avLst/>
               <a:pathLst>
-                <a:path w="7682587" h="0">
+                <a:path w="0" h="3427824">
                   <a:moveTo>
+                    <a:pt x="0" y="3427824"/>
+                  </a:moveTo>
+                  <a:lnTo>
                     <a:pt x="0" y="0"/>
-                  </a:moveTo>
-                  <a:lnTo>
-                    <a:pt x="7682587" y="0"/>
-                  </a:lnTo>
-                  <a:lnTo>
-                    <a:pt x="7682587" y="0"/>
+                  </a:lnTo>
+                  <a:lnTo>
+                    <a:pt x="0" y="0"/>
                   </a:lnTo>
                 </a:path>
               </a:pathLst>
             </a:custGeom>
-            <a:ln w="17246" cap="flat">
+            <a:ln w="8623" cap="flat">
               <a:solidFill>
                 <a:srgbClr val="EBEBEB">
                   <a:alpha val="100000"/>
@@ -2701,26 +2701,26 @@
           </p:nvSpPr>
           <p:spPr>
             <a:xfrm>
-              <a:off x="915645" y="3891352"/>
-              <a:ext cx="7682587" cy="0"/>
+              <a:off x="6502981" y="2185486"/>
+              <a:ext cx="0" cy="3427824"/>
             </a:xfrm>
             <a:custGeom>
               <a:avLst/>
               <a:pathLst>
-                <a:path w="7682587" h="0">
+                <a:path w="0" h="3427824">
                   <a:moveTo>
+                    <a:pt x="0" y="3427824"/>
+                  </a:moveTo>
+                  <a:lnTo>
                     <a:pt x="0" y="0"/>
-                  </a:moveTo>
-                  <a:lnTo>
-                    <a:pt x="7682587" y="0"/>
-                  </a:lnTo>
-                  <a:lnTo>
-                    <a:pt x="7682587" y="0"/>
+                  </a:lnTo>
+                  <a:lnTo>
+                    <a:pt x="0" y="0"/>
                   </a:lnTo>
                 </a:path>
               </a:pathLst>
             </a:custGeom>
-            <a:ln w="17246" cap="flat">
+            <a:ln w="8623" cap="flat">
               <a:solidFill>
                 <a:srgbClr val="EBEBEB">
                   <a:alpha val="100000"/>
@@ -2744,26 +2744,26 @@
           </p:nvSpPr>
           <p:spPr>
             <a:xfrm>
-              <a:off x="915645" y="3126723"/>
-              <a:ext cx="7682587" cy="0"/>
+              <a:off x="7376002" y="2185486"/>
+              <a:ext cx="0" cy="3427824"/>
             </a:xfrm>
             <a:custGeom>
               <a:avLst/>
               <a:pathLst>
-                <a:path w="7682587" h="0">
+                <a:path w="0" h="3427824">
                   <a:moveTo>
+                    <a:pt x="0" y="3427824"/>
+                  </a:moveTo>
+                  <a:lnTo>
                     <a:pt x="0" y="0"/>
-                  </a:moveTo>
-                  <a:lnTo>
-                    <a:pt x="7682587" y="0"/>
-                  </a:lnTo>
-                  <a:lnTo>
-                    <a:pt x="7682587" y="0"/>
+                  </a:lnTo>
+                  <a:lnTo>
+                    <a:pt x="0" y="0"/>
                   </a:lnTo>
                 </a:path>
               </a:pathLst>
             </a:custGeom>
-            <a:ln w="17246" cap="flat">
+            <a:ln w="8623" cap="flat">
               <a:solidFill>
                 <a:srgbClr val="EBEBEB">
                   <a:alpha val="100000"/>
@@ -2787,26 +2787,26 @@
           </p:nvSpPr>
           <p:spPr>
             <a:xfrm>
-              <a:off x="915645" y="2362095"/>
-              <a:ext cx="7682587" cy="0"/>
+              <a:off x="8249023" y="2185486"/>
+              <a:ext cx="0" cy="3427824"/>
             </a:xfrm>
             <a:custGeom>
               <a:avLst/>
               <a:pathLst>
-                <a:path w="7682587" h="0">
+                <a:path w="0" h="3427824">
                   <a:moveTo>
+                    <a:pt x="0" y="3427824"/>
+                  </a:moveTo>
+                  <a:lnTo>
                     <a:pt x="0" y="0"/>
-                  </a:moveTo>
-                  <a:lnTo>
-                    <a:pt x="7682587" y="0"/>
-                  </a:lnTo>
-                  <a:lnTo>
-                    <a:pt x="7682587" y="0"/>
+                  </a:lnTo>
+                  <a:lnTo>
+                    <a:pt x="0" y="0"/>
                   </a:lnTo>
                 </a:path>
               </a:pathLst>
             </a:custGeom>
-            <a:ln w="17246" cap="flat">
+            <a:ln w="8623" cap="flat">
               <a:solidFill>
                 <a:srgbClr val="EBEBEB">
                   <a:alpha val="100000"/>
@@ -2830,21 +2830,21 @@
           </p:nvSpPr>
           <p:spPr>
             <a:xfrm>
-              <a:off x="2574385" y="2209169"/>
-              <a:ext cx="0" cy="3364365"/>
+              <a:off x="915645" y="5457500"/>
+              <a:ext cx="7682587" cy="0"/>
             </a:xfrm>
             <a:custGeom>
               <a:avLst/>
               <a:pathLst>
-                <a:path w="0" h="3364365">
+                <a:path w="7682587" h="0">
                   <a:moveTo>
-                    <a:pt x="0" y="3364365"/>
+                    <a:pt x="0" y="0"/>
                   </a:moveTo>
                   <a:lnTo>
-                    <a:pt x="0" y="0"/>
-                  </a:lnTo>
-                  <a:lnTo>
-                    <a:pt x="0" y="0"/>
+                    <a:pt x="7682587" y="0"/>
+                  </a:lnTo>
+                  <a:lnTo>
+                    <a:pt x="7682587" y="0"/>
                   </a:lnTo>
                 </a:path>
               </a:pathLst>
@@ -2873,21 +2873,21 @@
           </p:nvSpPr>
           <p:spPr>
             <a:xfrm>
-              <a:off x="4320427" y="2209169"/>
-              <a:ext cx="0" cy="3364365"/>
+              <a:off x="915645" y="4678449"/>
+              <a:ext cx="7682587" cy="0"/>
             </a:xfrm>
             <a:custGeom>
               <a:avLst/>
               <a:pathLst>
-                <a:path w="0" h="3364365">
+                <a:path w="7682587" h="0">
                   <a:moveTo>
-                    <a:pt x="0" y="3364365"/>
+                    <a:pt x="0" y="0"/>
                   </a:moveTo>
                   <a:lnTo>
-                    <a:pt x="0" y="0"/>
-                  </a:lnTo>
-                  <a:lnTo>
-                    <a:pt x="0" y="0"/>
+                    <a:pt x="7682587" y="0"/>
+                  </a:lnTo>
+                  <a:lnTo>
+                    <a:pt x="7682587" y="0"/>
                   </a:lnTo>
                 </a:path>
               </a:pathLst>
@@ -2916,21 +2916,21 @@
           </p:nvSpPr>
           <p:spPr>
             <a:xfrm>
-              <a:off x="6066470" y="2209169"/>
-              <a:ext cx="0" cy="3364365"/>
+              <a:off x="915645" y="3899398"/>
+              <a:ext cx="7682587" cy="0"/>
             </a:xfrm>
             <a:custGeom>
               <a:avLst/>
               <a:pathLst>
-                <a:path w="0" h="3364365">
+                <a:path w="7682587" h="0">
                   <a:moveTo>
-                    <a:pt x="0" y="3364365"/>
+                    <a:pt x="0" y="0"/>
                   </a:moveTo>
                   <a:lnTo>
-                    <a:pt x="0" y="0"/>
-                  </a:lnTo>
-                  <a:lnTo>
-                    <a:pt x="0" y="0"/>
+                    <a:pt x="7682587" y="0"/>
+                  </a:lnTo>
+                  <a:lnTo>
+                    <a:pt x="7682587" y="0"/>
                   </a:lnTo>
                 </a:path>
               </a:pathLst>
@@ -2959,21 +2959,21 @@
           </p:nvSpPr>
           <p:spPr>
             <a:xfrm>
-              <a:off x="7812512" y="2209169"/>
-              <a:ext cx="0" cy="3364365"/>
+              <a:off x="915645" y="3120347"/>
+              <a:ext cx="7682587" cy="0"/>
             </a:xfrm>
             <a:custGeom>
               <a:avLst/>
               <a:pathLst>
-                <a:path w="0" h="3364365">
+                <a:path w="7682587" h="0">
                   <a:moveTo>
-                    <a:pt x="0" y="3364365"/>
+                    <a:pt x="0" y="0"/>
                   </a:moveTo>
                   <a:lnTo>
-                    <a:pt x="0" y="0"/>
-                  </a:lnTo>
-                  <a:lnTo>
-                    <a:pt x="0" y="0"/>
+                    <a:pt x="7682587" y="0"/>
+                  </a:lnTo>
+                  <a:lnTo>
+                    <a:pt x="7682587" y="0"/>
                   </a:lnTo>
                 </a:path>
               </a:pathLst>
@@ -2996,564 +2996,951 @@
         </p:sp>
         <p:sp>
           <p:nvSpPr>
-            <p:cNvPr id="21" name="pg21"/>
+            <p:cNvPr id="21" name="pl21"/>
             <p:cNvSpPr/>
             <p:nvPr/>
           </p:nvSpPr>
           <p:spPr>
             <a:xfrm>
-              <a:off x="915645" y="2209169"/>
-              <a:ext cx="7260303" cy="3130568"/>
+              <a:off x="915645" y="2341296"/>
+              <a:ext cx="7682587" cy="0"/>
             </a:xfrm>
             <a:custGeom>
               <a:avLst/>
               <a:pathLst>
-                <a:path w="7260303" h="3130568">
+                <a:path w="7682587" h="0">
+                  <a:moveTo>
+                    <a:pt x="0" y="0"/>
+                  </a:moveTo>
+                  <a:lnTo>
+                    <a:pt x="7682587" y="0"/>
+                  </a:lnTo>
+                  <a:lnTo>
+                    <a:pt x="7682587" y="0"/>
+                  </a:lnTo>
+                </a:path>
+              </a:pathLst>
+            </a:custGeom>
+            <a:ln w="17246" cap="flat">
+              <a:solidFill>
+                <a:srgbClr val="EBEBEB">
+                  <a:alpha val="100000"/>
+                </a:srgbClr>
+              </a:solidFill>
+              <a:prstDash val="solid"/>
+              <a:round/>
+            </a:ln>
+          </p:spPr>
+          <p:txBody>
+            <a:bodyPr/>
+            <a:lstStyle/>
+            <a:p/>
+          </p:txBody>
+        </p:sp>
+        <p:sp>
+          <p:nvSpPr>
+            <p:cNvPr id="22" name="pl22"/>
+            <p:cNvSpPr/>
+            <p:nvPr/>
+          </p:nvSpPr>
+          <p:spPr>
+            <a:xfrm>
+              <a:off x="1701364" y="2185486"/>
+              <a:ext cx="0" cy="3427824"/>
+            </a:xfrm>
+            <a:custGeom>
+              <a:avLst/>
+              <a:pathLst>
+                <a:path w="0" h="3427824">
+                  <a:moveTo>
+                    <a:pt x="0" y="3427824"/>
+                  </a:moveTo>
+                  <a:lnTo>
+                    <a:pt x="0" y="0"/>
+                  </a:lnTo>
+                  <a:lnTo>
+                    <a:pt x="0" y="0"/>
+                  </a:lnTo>
+                </a:path>
+              </a:pathLst>
+            </a:custGeom>
+            <a:ln w="17246" cap="flat">
+              <a:solidFill>
+                <a:srgbClr val="EBEBEB">
+                  <a:alpha val="100000"/>
+                </a:srgbClr>
+              </a:solidFill>
+              <a:prstDash val="solid"/>
+              <a:round/>
+            </a:ln>
+          </p:spPr>
+          <p:txBody>
+            <a:bodyPr/>
+            <a:lstStyle/>
+            <a:p/>
+          </p:txBody>
+        </p:sp>
+        <p:sp>
+          <p:nvSpPr>
+            <p:cNvPr id="23" name="pl23"/>
+            <p:cNvSpPr/>
+            <p:nvPr/>
+          </p:nvSpPr>
+          <p:spPr>
+            <a:xfrm>
+              <a:off x="2574385" y="2185486"/>
+              <a:ext cx="0" cy="3427824"/>
+            </a:xfrm>
+            <a:custGeom>
+              <a:avLst/>
+              <a:pathLst>
+                <a:path w="0" h="3427824">
+                  <a:moveTo>
+                    <a:pt x="0" y="3427824"/>
+                  </a:moveTo>
+                  <a:lnTo>
+                    <a:pt x="0" y="0"/>
+                  </a:lnTo>
+                  <a:lnTo>
+                    <a:pt x="0" y="0"/>
+                  </a:lnTo>
+                </a:path>
+              </a:pathLst>
+            </a:custGeom>
+            <a:ln w="17246" cap="flat">
+              <a:solidFill>
+                <a:srgbClr val="EBEBEB">
+                  <a:alpha val="100000"/>
+                </a:srgbClr>
+              </a:solidFill>
+              <a:prstDash val="solid"/>
+              <a:round/>
+            </a:ln>
+          </p:spPr>
+          <p:txBody>
+            <a:bodyPr/>
+            <a:lstStyle/>
+            <a:p/>
+          </p:txBody>
+        </p:sp>
+        <p:sp>
+          <p:nvSpPr>
+            <p:cNvPr id="24" name="pl24"/>
+            <p:cNvSpPr/>
+            <p:nvPr/>
+          </p:nvSpPr>
+          <p:spPr>
+            <a:xfrm>
+              <a:off x="3447406" y="2185486"/>
+              <a:ext cx="0" cy="3427824"/>
+            </a:xfrm>
+            <a:custGeom>
+              <a:avLst/>
+              <a:pathLst>
+                <a:path w="0" h="3427824">
+                  <a:moveTo>
+                    <a:pt x="0" y="3427824"/>
+                  </a:moveTo>
+                  <a:lnTo>
+                    <a:pt x="0" y="0"/>
+                  </a:lnTo>
+                  <a:lnTo>
+                    <a:pt x="0" y="0"/>
+                  </a:lnTo>
+                </a:path>
+              </a:pathLst>
+            </a:custGeom>
+            <a:ln w="17246" cap="flat">
+              <a:solidFill>
+                <a:srgbClr val="EBEBEB">
+                  <a:alpha val="100000"/>
+                </a:srgbClr>
+              </a:solidFill>
+              <a:prstDash val="solid"/>
+              <a:round/>
+            </a:ln>
+          </p:spPr>
+          <p:txBody>
+            <a:bodyPr/>
+            <a:lstStyle/>
+            <a:p/>
+          </p:txBody>
+        </p:sp>
+        <p:sp>
+          <p:nvSpPr>
+            <p:cNvPr id="25" name="pl25"/>
+            <p:cNvSpPr/>
+            <p:nvPr/>
+          </p:nvSpPr>
+          <p:spPr>
+            <a:xfrm>
+              <a:off x="4320427" y="2185486"/>
+              <a:ext cx="0" cy="3427824"/>
+            </a:xfrm>
+            <a:custGeom>
+              <a:avLst/>
+              <a:pathLst>
+                <a:path w="0" h="3427824">
+                  <a:moveTo>
+                    <a:pt x="0" y="3427824"/>
+                  </a:moveTo>
+                  <a:lnTo>
+                    <a:pt x="0" y="0"/>
+                  </a:lnTo>
+                  <a:lnTo>
+                    <a:pt x="0" y="0"/>
+                  </a:lnTo>
+                </a:path>
+              </a:pathLst>
+            </a:custGeom>
+            <a:ln w="17246" cap="flat">
+              <a:solidFill>
+                <a:srgbClr val="EBEBEB">
+                  <a:alpha val="100000"/>
+                </a:srgbClr>
+              </a:solidFill>
+              <a:prstDash val="solid"/>
+              <a:round/>
+            </a:ln>
+          </p:spPr>
+          <p:txBody>
+            <a:bodyPr/>
+            <a:lstStyle/>
+            <a:p/>
+          </p:txBody>
+        </p:sp>
+        <p:sp>
+          <p:nvSpPr>
+            <p:cNvPr id="26" name="pl26"/>
+            <p:cNvSpPr/>
+            <p:nvPr/>
+          </p:nvSpPr>
+          <p:spPr>
+            <a:xfrm>
+              <a:off x="5193449" y="2185486"/>
+              <a:ext cx="0" cy="3427824"/>
+            </a:xfrm>
+            <a:custGeom>
+              <a:avLst/>
+              <a:pathLst>
+                <a:path w="0" h="3427824">
+                  <a:moveTo>
+                    <a:pt x="0" y="3427824"/>
+                  </a:moveTo>
+                  <a:lnTo>
+                    <a:pt x="0" y="0"/>
+                  </a:lnTo>
+                  <a:lnTo>
+                    <a:pt x="0" y="0"/>
+                  </a:lnTo>
+                </a:path>
+              </a:pathLst>
+            </a:custGeom>
+            <a:ln w="17246" cap="flat">
+              <a:solidFill>
+                <a:srgbClr val="EBEBEB">
+                  <a:alpha val="100000"/>
+                </a:srgbClr>
+              </a:solidFill>
+              <a:prstDash val="solid"/>
+              <a:round/>
+            </a:ln>
+          </p:spPr>
+          <p:txBody>
+            <a:bodyPr/>
+            <a:lstStyle/>
+            <a:p/>
+          </p:txBody>
+        </p:sp>
+        <p:sp>
+          <p:nvSpPr>
+            <p:cNvPr id="27" name="pl27"/>
+            <p:cNvSpPr/>
+            <p:nvPr/>
+          </p:nvSpPr>
+          <p:spPr>
+            <a:xfrm>
+              <a:off x="6066470" y="2185486"/>
+              <a:ext cx="0" cy="3427824"/>
+            </a:xfrm>
+            <a:custGeom>
+              <a:avLst/>
+              <a:pathLst>
+                <a:path w="0" h="3427824">
+                  <a:moveTo>
+                    <a:pt x="0" y="3427824"/>
+                  </a:moveTo>
+                  <a:lnTo>
+                    <a:pt x="0" y="0"/>
+                  </a:lnTo>
+                  <a:lnTo>
+                    <a:pt x="0" y="0"/>
+                  </a:lnTo>
+                </a:path>
+              </a:pathLst>
+            </a:custGeom>
+            <a:ln w="17246" cap="flat">
+              <a:solidFill>
+                <a:srgbClr val="EBEBEB">
+                  <a:alpha val="100000"/>
+                </a:srgbClr>
+              </a:solidFill>
+              <a:prstDash val="solid"/>
+              <a:round/>
+            </a:ln>
+          </p:spPr>
+          <p:txBody>
+            <a:bodyPr/>
+            <a:lstStyle/>
+            <a:p/>
+          </p:txBody>
+        </p:sp>
+        <p:sp>
+          <p:nvSpPr>
+            <p:cNvPr id="28" name="pl28"/>
+            <p:cNvSpPr/>
+            <p:nvPr/>
+          </p:nvSpPr>
+          <p:spPr>
+            <a:xfrm>
+              <a:off x="6939491" y="2185486"/>
+              <a:ext cx="0" cy="3427824"/>
+            </a:xfrm>
+            <a:custGeom>
+              <a:avLst/>
+              <a:pathLst>
+                <a:path w="0" h="3427824">
+                  <a:moveTo>
+                    <a:pt x="0" y="3427824"/>
+                  </a:moveTo>
+                  <a:lnTo>
+                    <a:pt x="0" y="0"/>
+                  </a:lnTo>
+                  <a:lnTo>
+                    <a:pt x="0" y="0"/>
+                  </a:lnTo>
+                </a:path>
+              </a:pathLst>
+            </a:custGeom>
+            <a:ln w="17246" cap="flat">
+              <a:solidFill>
+                <a:srgbClr val="EBEBEB">
+                  <a:alpha val="100000"/>
+                </a:srgbClr>
+              </a:solidFill>
+              <a:prstDash val="solid"/>
+              <a:round/>
+            </a:ln>
+          </p:spPr>
+          <p:txBody>
+            <a:bodyPr/>
+            <a:lstStyle/>
+            <a:p/>
+          </p:txBody>
+        </p:sp>
+        <p:sp>
+          <p:nvSpPr>
+            <p:cNvPr id="29" name="pl29"/>
+            <p:cNvSpPr/>
+            <p:nvPr/>
+          </p:nvSpPr>
+          <p:spPr>
+            <a:xfrm>
+              <a:off x="7812512" y="2185486"/>
+              <a:ext cx="0" cy="3427824"/>
+            </a:xfrm>
+            <a:custGeom>
+              <a:avLst/>
+              <a:pathLst>
+                <a:path w="0" h="3427824">
+                  <a:moveTo>
+                    <a:pt x="0" y="3427824"/>
+                  </a:moveTo>
+                  <a:lnTo>
+                    <a:pt x="0" y="0"/>
+                  </a:lnTo>
+                  <a:lnTo>
+                    <a:pt x="0" y="0"/>
+                  </a:lnTo>
+                </a:path>
+              </a:pathLst>
+            </a:custGeom>
+            <a:ln w="17246" cap="flat">
+              <a:solidFill>
+                <a:srgbClr val="EBEBEB">
+                  <a:alpha val="100000"/>
+                </a:srgbClr>
+              </a:solidFill>
+              <a:prstDash val="solid"/>
+              <a:round/>
+            </a:ln>
+          </p:spPr>
+          <p:txBody>
+            <a:bodyPr/>
+            <a:lstStyle/>
+            <a:p/>
+          </p:txBody>
+        </p:sp>
+        <p:sp>
+          <p:nvSpPr>
+            <p:cNvPr id="30" name="pg30"/>
+            <p:cNvSpPr/>
+            <p:nvPr/>
+          </p:nvSpPr>
+          <p:spPr>
+            <a:xfrm>
+              <a:off x="915645" y="2185486"/>
+              <a:ext cx="7260303" cy="3189618"/>
+            </a:xfrm>
+            <a:custGeom>
+              <a:avLst/>
+              <a:pathLst>
+                <a:path w="7260303" h="3189618">
                   <a:moveTo>
                     <a:pt x="828206" y="0"/>
                   </a:moveTo>
                   <a:lnTo>
-                    <a:pt x="836955" y="16353"/>
-                  </a:lnTo>
-                  <a:lnTo>
-                    <a:pt x="913423" y="153180"/>
-                  </a:lnTo>
-                  <a:lnTo>
-                    <a:pt x="989892" y="284147"/>
-                  </a:lnTo>
-                  <a:lnTo>
-                    <a:pt x="1066360" y="409505"/>
-                  </a:lnTo>
-                  <a:lnTo>
-                    <a:pt x="1142828" y="529495"/>
-                  </a:lnTo>
-                  <a:lnTo>
-                    <a:pt x="1219297" y="644347"/>
-                  </a:lnTo>
-                  <a:lnTo>
-                    <a:pt x="1295765" y="754280"/>
-                  </a:lnTo>
-                  <a:lnTo>
-                    <a:pt x="1372234" y="859505"/>
-                  </a:lnTo>
-                  <a:lnTo>
-                    <a:pt x="1448702" y="960225"/>
-                  </a:lnTo>
-                  <a:lnTo>
-                    <a:pt x="1525171" y="1056631"/>
-                  </a:lnTo>
-                  <a:lnTo>
-                    <a:pt x="1601639" y="1148908"/>
-                  </a:lnTo>
-                  <a:lnTo>
-                    <a:pt x="1678107" y="1237234"/>
-                  </a:lnTo>
-                  <a:lnTo>
-                    <a:pt x="1754576" y="1321778"/>
-                  </a:lnTo>
-                  <a:lnTo>
-                    <a:pt x="1831044" y="1402701"/>
-                  </a:lnTo>
-                  <a:lnTo>
-                    <a:pt x="1907513" y="1480158"/>
-                  </a:lnTo>
-                  <a:lnTo>
-                    <a:pt x="1983981" y="1554298"/>
-                  </a:lnTo>
-                  <a:lnTo>
-                    <a:pt x="2060450" y="1625264"/>
-                  </a:lnTo>
-                  <a:lnTo>
-                    <a:pt x="2136918" y="1693190"/>
-                  </a:lnTo>
-                  <a:lnTo>
-                    <a:pt x="2213386" y="1758208"/>
-                  </a:lnTo>
-                  <a:lnTo>
-                    <a:pt x="2289855" y="1820441"/>
-                  </a:lnTo>
-                  <a:lnTo>
-                    <a:pt x="2366323" y="1880009"/>
-                  </a:lnTo>
-                  <a:lnTo>
-                    <a:pt x="2442792" y="1937026"/>
-                  </a:lnTo>
-                  <a:lnTo>
-                    <a:pt x="2519260" y="1991602"/>
-                  </a:lnTo>
-                  <a:lnTo>
-                    <a:pt x="2595729" y="2043840"/>
-                  </a:lnTo>
-                  <a:lnTo>
-                    <a:pt x="2672197" y="2093842"/>
-                  </a:lnTo>
-                  <a:lnTo>
-                    <a:pt x="2748666" y="2141702"/>
-                  </a:lnTo>
-                  <a:lnTo>
-                    <a:pt x="2825134" y="2187512"/>
-                  </a:lnTo>
-                  <a:lnTo>
-                    <a:pt x="2901602" y="2231361"/>
-                  </a:lnTo>
-                  <a:lnTo>
-                    <a:pt x="2978071" y="2273332"/>
-                  </a:lnTo>
-                  <a:lnTo>
-                    <a:pt x="3054539" y="2313505"/>
-                  </a:lnTo>
-                  <a:lnTo>
-                    <a:pt x="3131008" y="2351958"/>
-                  </a:lnTo>
-                  <a:lnTo>
-                    <a:pt x="3207476" y="2388765"/>
-                  </a:lnTo>
-                  <a:lnTo>
-                    <a:pt x="3283945" y="2423995"/>
-                  </a:lnTo>
-                  <a:lnTo>
-                    <a:pt x="3360413" y="2446982"/>
-                  </a:lnTo>
-                  <a:lnTo>
-                    <a:pt x="3436881" y="2447504"/>
-                  </a:lnTo>
-                  <a:lnTo>
-                    <a:pt x="3513350" y="2448026"/>
-                  </a:lnTo>
-                  <a:lnTo>
-                    <a:pt x="3589818" y="2448548"/>
-                  </a:lnTo>
-                  <a:lnTo>
-                    <a:pt x="3666287" y="2449069"/>
-                  </a:lnTo>
-                  <a:lnTo>
-                    <a:pt x="3742755" y="2449590"/>
-                  </a:lnTo>
-                  <a:lnTo>
-                    <a:pt x="3819224" y="2450110"/>
-                  </a:lnTo>
-                  <a:lnTo>
-                    <a:pt x="3895692" y="2450630"/>
-                  </a:lnTo>
-                  <a:lnTo>
-                    <a:pt x="3972160" y="2451150"/>
-                  </a:lnTo>
-                  <a:lnTo>
-                    <a:pt x="4048629" y="2451669"/>
-                  </a:lnTo>
-                  <a:lnTo>
-                    <a:pt x="4125097" y="2452188"/>
-                  </a:lnTo>
-                  <a:lnTo>
-                    <a:pt x="4201566" y="2452707"/>
-                  </a:lnTo>
-                  <a:lnTo>
-                    <a:pt x="4278034" y="2453225"/>
-                  </a:lnTo>
-                  <a:lnTo>
-                    <a:pt x="4354503" y="2453743"/>
-                  </a:lnTo>
-                  <a:lnTo>
-                    <a:pt x="4430971" y="2454260"/>
-                  </a:lnTo>
-                  <a:lnTo>
-                    <a:pt x="4507439" y="2454778"/>
-                  </a:lnTo>
-                  <a:lnTo>
-                    <a:pt x="4583908" y="2455294"/>
-                  </a:lnTo>
-                  <a:lnTo>
-                    <a:pt x="4660376" y="2455811"/>
-                  </a:lnTo>
-                  <a:lnTo>
-                    <a:pt x="4736845" y="2456327"/>
-                  </a:lnTo>
-                  <a:lnTo>
-                    <a:pt x="4813313" y="2456843"/>
-                  </a:lnTo>
-                  <a:lnTo>
-                    <a:pt x="4889782" y="2457358"/>
-                  </a:lnTo>
-                  <a:lnTo>
-                    <a:pt x="4966250" y="2457873"/>
-                  </a:lnTo>
-                  <a:lnTo>
-                    <a:pt x="5042719" y="2458388"/>
-                  </a:lnTo>
-                  <a:lnTo>
-                    <a:pt x="5119187" y="2458903"/>
-                  </a:lnTo>
-                  <a:lnTo>
-                    <a:pt x="5195655" y="2459417"/>
-                  </a:lnTo>
-                  <a:lnTo>
-                    <a:pt x="5272124" y="2459930"/>
-                  </a:lnTo>
-                  <a:lnTo>
-                    <a:pt x="5348592" y="2460444"/>
-                  </a:lnTo>
-                  <a:lnTo>
-                    <a:pt x="5425061" y="2460957"/>
-                  </a:lnTo>
-                  <a:lnTo>
-                    <a:pt x="5501529" y="2461469"/>
-                  </a:lnTo>
-                  <a:lnTo>
-                    <a:pt x="5577998" y="2461982"/>
-                  </a:lnTo>
-                  <a:lnTo>
-                    <a:pt x="5654466" y="2462493"/>
-                  </a:lnTo>
-                  <a:lnTo>
-                    <a:pt x="5730934" y="2463005"/>
-                  </a:lnTo>
-                  <a:lnTo>
-                    <a:pt x="5807403" y="2463516"/>
-                  </a:lnTo>
-                  <a:lnTo>
-                    <a:pt x="5883871" y="2464027"/>
-                  </a:lnTo>
-                  <a:lnTo>
-                    <a:pt x="5960340" y="2464538"/>
-                  </a:lnTo>
-                  <a:lnTo>
-                    <a:pt x="6036808" y="2465048"/>
-                  </a:lnTo>
-                  <a:lnTo>
-                    <a:pt x="6113277" y="2465558"/>
-                  </a:lnTo>
-                  <a:lnTo>
-                    <a:pt x="6189745" y="2466067"/>
-                  </a:lnTo>
-                  <a:lnTo>
-                    <a:pt x="6266213" y="2466576"/>
-                  </a:lnTo>
-                  <a:lnTo>
-                    <a:pt x="6342682" y="2467085"/>
-                  </a:lnTo>
-                  <a:lnTo>
-                    <a:pt x="6419150" y="2467594"/>
-                  </a:lnTo>
-                  <a:lnTo>
-                    <a:pt x="6495619" y="2468102"/>
-                  </a:lnTo>
-                  <a:lnTo>
-                    <a:pt x="6572087" y="2468610"/>
-                  </a:lnTo>
-                  <a:lnTo>
-                    <a:pt x="6648556" y="2469117"/>
-                  </a:lnTo>
-                  <a:lnTo>
-                    <a:pt x="6725024" y="2469624"/>
-                  </a:lnTo>
-                  <a:lnTo>
-                    <a:pt x="6801492" y="2470131"/>
-                  </a:lnTo>
-                  <a:lnTo>
-                    <a:pt x="6877961" y="2470637"/>
-                  </a:lnTo>
-                  <a:lnTo>
-                    <a:pt x="6954429" y="2471143"/>
-                  </a:lnTo>
-                  <a:lnTo>
-                    <a:pt x="7030898" y="2471649"/>
-                  </a:lnTo>
-                  <a:lnTo>
-                    <a:pt x="7107366" y="2472154"/>
-                  </a:lnTo>
-                  <a:lnTo>
-                    <a:pt x="7183835" y="2472659"/>
-                  </a:lnTo>
-                  <a:lnTo>
-                    <a:pt x="7260303" y="2473164"/>
-                  </a:lnTo>
-                  <a:lnTo>
-                    <a:pt x="7260303" y="3130568"/>
-                  </a:lnTo>
-                  <a:lnTo>
-                    <a:pt x="7183835" y="3126950"/>
-                  </a:lnTo>
-                  <a:lnTo>
-                    <a:pt x="7107366" y="3123170"/>
-                  </a:lnTo>
-                  <a:lnTo>
-                    <a:pt x="7030898" y="3119221"/>
-                  </a:lnTo>
-                  <a:lnTo>
-                    <a:pt x="6954429" y="3115095"/>
-                  </a:lnTo>
-                  <a:lnTo>
-                    <a:pt x="6877961" y="3110785"/>
-                  </a:lnTo>
-                  <a:lnTo>
-                    <a:pt x="6801492" y="3106281"/>
-                  </a:lnTo>
-                  <a:lnTo>
-                    <a:pt x="6725024" y="3101576"/>
-                  </a:lnTo>
-                  <a:lnTo>
-                    <a:pt x="6648556" y="3096661"/>
-                  </a:lnTo>
-                  <a:lnTo>
-                    <a:pt x="6572087" y="3091526"/>
-                  </a:lnTo>
-                  <a:lnTo>
-                    <a:pt x="6495619" y="3086161"/>
-                  </a:lnTo>
-                  <a:lnTo>
-                    <a:pt x="6419150" y="3080556"/>
-                  </a:lnTo>
-                  <a:lnTo>
-                    <a:pt x="6342682" y="3074701"/>
-                  </a:lnTo>
-                  <a:lnTo>
-                    <a:pt x="6266213" y="3068583"/>
-                  </a:lnTo>
-                  <a:lnTo>
-                    <a:pt x="6189745" y="3062191"/>
-                  </a:lnTo>
-                  <a:lnTo>
-                    <a:pt x="6113277" y="3055514"/>
-                  </a:lnTo>
-                  <a:lnTo>
-                    <a:pt x="6036808" y="3048538"/>
-                  </a:lnTo>
-                  <a:lnTo>
-                    <a:pt x="5960340" y="3041250"/>
-                  </a:lnTo>
-                  <a:lnTo>
-                    <a:pt x="5883871" y="3033636"/>
-                  </a:lnTo>
-                  <a:lnTo>
-                    <a:pt x="5807403" y="3025681"/>
-                  </a:lnTo>
-                  <a:lnTo>
-                    <a:pt x="5730934" y="3017370"/>
-                  </a:lnTo>
-                  <a:lnTo>
-                    <a:pt x="5654466" y="3008687"/>
-                  </a:lnTo>
-                  <a:lnTo>
-                    <a:pt x="5577998" y="2999616"/>
-                  </a:lnTo>
-                  <a:lnTo>
-                    <a:pt x="5501529" y="2990139"/>
-                  </a:lnTo>
-                  <a:lnTo>
-                    <a:pt x="5425061" y="2980238"/>
-                  </a:lnTo>
-                  <a:lnTo>
-                    <a:pt x="5348592" y="2969894"/>
-                  </a:lnTo>
-                  <a:lnTo>
-                    <a:pt x="5272124" y="2959087"/>
-                  </a:lnTo>
-                  <a:lnTo>
-                    <a:pt x="5195655" y="2947797"/>
-                  </a:lnTo>
-                  <a:lnTo>
-                    <a:pt x="5119187" y="2936002"/>
-                  </a:lnTo>
-                  <a:lnTo>
-                    <a:pt x="5042719" y="2923679"/>
-                  </a:lnTo>
-                  <a:lnTo>
-                    <a:pt x="4966250" y="2910804"/>
-                  </a:lnTo>
-                  <a:lnTo>
-                    <a:pt x="4889782" y="2897354"/>
-                  </a:lnTo>
-                  <a:lnTo>
-                    <a:pt x="4813313" y="2883302"/>
-                  </a:lnTo>
-                  <a:lnTo>
-                    <a:pt x="4736845" y="2868621"/>
-                  </a:lnTo>
-                  <a:lnTo>
-                    <a:pt x="4660376" y="2853283"/>
-                  </a:lnTo>
-                  <a:lnTo>
-                    <a:pt x="4583908" y="2837259"/>
-                  </a:lnTo>
-                  <a:lnTo>
-                    <a:pt x="4507439" y="2820519"/>
-                  </a:lnTo>
-                  <a:lnTo>
-                    <a:pt x="4430971" y="2803029"/>
-                  </a:lnTo>
-                  <a:lnTo>
-                    <a:pt x="4354503" y="2784757"/>
-                  </a:lnTo>
-                  <a:lnTo>
-                    <a:pt x="4278034" y="2765667"/>
-                  </a:lnTo>
-                  <a:lnTo>
-                    <a:pt x="4201566" y="2745723"/>
-                  </a:lnTo>
-                  <a:lnTo>
-                    <a:pt x="4125097" y="2724887"/>
-                  </a:lnTo>
-                  <a:lnTo>
-                    <a:pt x="4048629" y="2703119"/>
-                  </a:lnTo>
-                  <a:lnTo>
-                    <a:pt x="3972160" y="2680376"/>
-                  </a:lnTo>
-                  <a:lnTo>
-                    <a:pt x="3895692" y="2656617"/>
-                  </a:lnTo>
-                  <a:lnTo>
-                    <a:pt x="3819224" y="2631794"/>
-                  </a:lnTo>
-                  <a:lnTo>
-                    <a:pt x="3742755" y="2605861"/>
-                  </a:lnTo>
-                  <a:lnTo>
-                    <a:pt x="3666287" y="2578767"/>
-                  </a:lnTo>
-                  <a:lnTo>
-                    <a:pt x="3589818" y="2550461"/>
-                  </a:lnTo>
-                  <a:lnTo>
-                    <a:pt x="3513350" y="2520889"/>
-                  </a:lnTo>
-                  <a:lnTo>
-                    <a:pt x="3436881" y="2489994"/>
-                  </a:lnTo>
-                  <a:lnTo>
-                    <a:pt x="3360413" y="2457716"/>
-                  </a:lnTo>
-                  <a:lnTo>
-                    <a:pt x="3283945" y="2446460"/>
-                  </a:lnTo>
-                  <a:lnTo>
-                    <a:pt x="3207476" y="2445937"/>
-                  </a:lnTo>
-                  <a:lnTo>
-                    <a:pt x="3131008" y="2445413"/>
-                  </a:lnTo>
-                  <a:lnTo>
-                    <a:pt x="3054539" y="2444890"/>
-                  </a:lnTo>
-                  <a:lnTo>
-                    <a:pt x="2978071" y="2444366"/>
-                  </a:lnTo>
-                  <a:lnTo>
-                    <a:pt x="2901602" y="2443842"/>
-                  </a:lnTo>
-                  <a:lnTo>
-                    <a:pt x="2825134" y="2443317"/>
-                  </a:lnTo>
-                  <a:lnTo>
-                    <a:pt x="2748666" y="2442792"/>
-                  </a:lnTo>
-                  <a:lnTo>
-                    <a:pt x="2672197" y="2442266"/>
-                  </a:lnTo>
-                  <a:lnTo>
-                    <a:pt x="2595729" y="2441741"/>
-                  </a:lnTo>
-                  <a:lnTo>
-                    <a:pt x="2519260" y="2441215"/>
-                  </a:lnTo>
-                  <a:lnTo>
-                    <a:pt x="2442792" y="2440688"/>
-                  </a:lnTo>
-                  <a:lnTo>
-                    <a:pt x="2366323" y="2440161"/>
-                  </a:lnTo>
-                  <a:lnTo>
-                    <a:pt x="2289855" y="2439634"/>
-                  </a:lnTo>
-                  <a:lnTo>
-                    <a:pt x="2213386" y="2439106"/>
-                  </a:lnTo>
-                  <a:lnTo>
-                    <a:pt x="2136918" y="2438579"/>
-                  </a:lnTo>
-                  <a:lnTo>
-                    <a:pt x="2060450" y="2438050"/>
-                  </a:lnTo>
-                  <a:lnTo>
-                    <a:pt x="1983981" y="2437522"/>
-                  </a:lnTo>
-                  <a:lnTo>
-                    <a:pt x="1907513" y="2436993"/>
-                  </a:lnTo>
-                  <a:lnTo>
-                    <a:pt x="1831044" y="2436463"/>
-                  </a:lnTo>
-                  <a:lnTo>
-                    <a:pt x="1754576" y="2435933"/>
-                  </a:lnTo>
-                  <a:lnTo>
-                    <a:pt x="1678107" y="2435403"/>
-                  </a:lnTo>
-                  <a:lnTo>
-                    <a:pt x="1601639" y="2434873"/>
-                  </a:lnTo>
-                  <a:lnTo>
-                    <a:pt x="1525171" y="2434342"/>
-                  </a:lnTo>
-                  <a:lnTo>
-                    <a:pt x="1448702" y="2433811"/>
-                  </a:lnTo>
-                  <a:lnTo>
-                    <a:pt x="1372234" y="2433279"/>
-                  </a:lnTo>
-                  <a:lnTo>
-                    <a:pt x="1295765" y="2432747"/>
-                  </a:lnTo>
-                  <a:lnTo>
-                    <a:pt x="1219297" y="2432215"/>
-                  </a:lnTo>
-                  <a:lnTo>
-                    <a:pt x="1142828" y="2431683"/>
-                  </a:lnTo>
-                  <a:lnTo>
-                    <a:pt x="1066360" y="2431150"/>
-                  </a:lnTo>
-                  <a:lnTo>
-                    <a:pt x="989892" y="2430616"/>
-                  </a:lnTo>
-                  <a:lnTo>
-                    <a:pt x="913423" y="2430082"/>
-                  </a:lnTo>
-                  <a:lnTo>
-                    <a:pt x="836955" y="2429548"/>
-                  </a:lnTo>
-                  <a:lnTo>
-                    <a:pt x="760486" y="2429014"/>
-                  </a:lnTo>
-                  <a:lnTo>
-                    <a:pt x="684018" y="2428479"/>
-                  </a:lnTo>
-                  <a:lnTo>
-                    <a:pt x="607549" y="2427944"/>
-                  </a:lnTo>
-                  <a:lnTo>
-                    <a:pt x="531081" y="2427408"/>
-                  </a:lnTo>
-                  <a:lnTo>
-                    <a:pt x="454613" y="2426872"/>
-                  </a:lnTo>
-                  <a:lnTo>
-                    <a:pt x="378144" y="2426336"/>
-                  </a:lnTo>
-                  <a:lnTo>
-                    <a:pt x="301676" y="2425800"/>
-                  </a:lnTo>
-                  <a:lnTo>
-                    <a:pt x="225207" y="2425262"/>
-                  </a:lnTo>
-                  <a:lnTo>
-                    <a:pt x="148739" y="2424725"/>
-                  </a:lnTo>
-                  <a:lnTo>
-                    <a:pt x="72270" y="2424187"/>
-                  </a:lnTo>
-                  <a:lnTo>
-                    <a:pt x="0" y="2423679"/>
+                    <a:pt x="836955" y="16662"/>
+                  </a:lnTo>
+                  <a:lnTo>
+                    <a:pt x="913423" y="156069"/>
+                  </a:lnTo>
+                  <a:lnTo>
+                    <a:pt x="989892" y="289506"/>
+                  </a:lnTo>
+                  <a:lnTo>
+                    <a:pt x="1066360" y="417229"/>
+                  </a:lnTo>
+                  <a:lnTo>
+                    <a:pt x="1142828" y="539483"/>
+                  </a:lnTo>
+                  <a:lnTo>
+                    <a:pt x="1219297" y="656501"/>
+                  </a:lnTo>
+                  <a:lnTo>
+                    <a:pt x="1295765" y="768507"/>
+                  </a:lnTo>
+                  <a:lnTo>
+                    <a:pt x="1372234" y="875718"/>
+                  </a:lnTo>
+                  <a:lnTo>
+                    <a:pt x="1448702" y="978337"/>
+                  </a:lnTo>
+                  <a:lnTo>
+                    <a:pt x="1525171" y="1076561"/>
+                  </a:lnTo>
+                  <a:lnTo>
+                    <a:pt x="1601639" y="1170579"/>
+                  </a:lnTo>
+                  <a:lnTo>
+                    <a:pt x="1678107" y="1260571"/>
+                  </a:lnTo>
+                  <a:lnTo>
+                    <a:pt x="1754576" y="1346709"/>
+                  </a:lnTo>
+                  <a:lnTo>
+                    <a:pt x="1831044" y="1429159"/>
+                  </a:lnTo>
+                  <a:lnTo>
+                    <a:pt x="1907513" y="1508077"/>
+                  </a:lnTo>
+                  <a:lnTo>
+                    <a:pt x="1983981" y="1583616"/>
+                  </a:lnTo>
+                  <a:lnTo>
+                    <a:pt x="2060450" y="1655920"/>
+                  </a:lnTo>
+                  <a:lnTo>
+                    <a:pt x="2136918" y="1725128"/>
+                  </a:lnTo>
+                  <a:lnTo>
+                    <a:pt x="2213386" y="1791372"/>
+                  </a:lnTo>
+                  <a:lnTo>
+                    <a:pt x="2289855" y="1854779"/>
+                  </a:lnTo>
+                  <a:lnTo>
+                    <a:pt x="2366323" y="1915470"/>
+                  </a:lnTo>
+                  <a:lnTo>
+                    <a:pt x="2442792" y="1973563"/>
+                  </a:lnTo>
+                  <a:lnTo>
+                    <a:pt x="2519260" y="2029168"/>
+                  </a:lnTo>
+                  <a:lnTo>
+                    <a:pt x="2595729" y="2082392"/>
+                  </a:lnTo>
+                  <a:lnTo>
+                    <a:pt x="2672197" y="2133336"/>
+                  </a:lnTo>
+                  <a:lnTo>
+                    <a:pt x="2748666" y="2182099"/>
+                  </a:lnTo>
+                  <a:lnTo>
+                    <a:pt x="2825134" y="2228773"/>
+                  </a:lnTo>
+                  <a:lnTo>
+                    <a:pt x="2901602" y="2273449"/>
+                  </a:lnTo>
+                  <a:lnTo>
+                    <a:pt x="2978071" y="2316212"/>
+                  </a:lnTo>
+                  <a:lnTo>
+                    <a:pt x="3054539" y="2357143"/>
+                  </a:lnTo>
+                  <a:lnTo>
+                    <a:pt x="3131008" y="2396321"/>
+                  </a:lnTo>
+                  <a:lnTo>
+                    <a:pt x="3207476" y="2433822"/>
+                  </a:lnTo>
+                  <a:lnTo>
+                    <a:pt x="3283945" y="2469717"/>
+                  </a:lnTo>
+                  <a:lnTo>
+                    <a:pt x="3360413" y="2493138"/>
+                  </a:lnTo>
+                  <a:lnTo>
+                    <a:pt x="3436881" y="2493670"/>
+                  </a:lnTo>
+                  <a:lnTo>
+                    <a:pt x="3513350" y="2494201"/>
+                  </a:lnTo>
+                  <a:lnTo>
+                    <a:pt x="3589818" y="2494733"/>
+                  </a:lnTo>
+                  <a:lnTo>
+                    <a:pt x="3666287" y="2495264"/>
+                  </a:lnTo>
+                  <a:lnTo>
+                    <a:pt x="3742755" y="2495794"/>
+                  </a:lnTo>
+                  <a:lnTo>
+                    <a:pt x="3819224" y="2496324"/>
+                  </a:lnTo>
+                  <a:lnTo>
+                    <a:pt x="3895692" y="2496854"/>
+                  </a:lnTo>
+                  <a:lnTo>
+                    <a:pt x="3972160" y="2497384"/>
+                  </a:lnTo>
+                  <a:lnTo>
+                    <a:pt x="4048629" y="2497913"/>
+                  </a:lnTo>
+                  <a:lnTo>
+                    <a:pt x="4125097" y="2498442"/>
+                  </a:lnTo>
+                  <a:lnTo>
+                    <a:pt x="4201566" y="2498970"/>
+                  </a:lnTo>
+                  <a:lnTo>
+                    <a:pt x="4278034" y="2499498"/>
+                  </a:lnTo>
+                  <a:lnTo>
+                    <a:pt x="4354503" y="2500026"/>
+                  </a:lnTo>
+                  <a:lnTo>
+                    <a:pt x="4430971" y="2500553"/>
+                  </a:lnTo>
+                  <a:lnTo>
+                    <a:pt x="4507439" y="2501080"/>
+                  </a:lnTo>
+                  <a:lnTo>
+                    <a:pt x="4583908" y="2501607"/>
+                  </a:lnTo>
+                  <a:lnTo>
+                    <a:pt x="4660376" y="2502133"/>
+                  </a:lnTo>
+                  <a:lnTo>
+                    <a:pt x="4736845" y="2502659"/>
+                  </a:lnTo>
+                  <a:lnTo>
+                    <a:pt x="4813313" y="2503184"/>
+                  </a:lnTo>
+                  <a:lnTo>
+                    <a:pt x="4889782" y="2503710"/>
+                  </a:lnTo>
+                  <a:lnTo>
+                    <a:pt x="4966250" y="2504234"/>
+                  </a:lnTo>
+                  <a:lnTo>
+                    <a:pt x="5042719" y="2504759"/>
+                  </a:lnTo>
+                  <a:lnTo>
+                    <a:pt x="5119187" y="2505283"/>
+                  </a:lnTo>
+                  <a:lnTo>
+                    <a:pt x="5195655" y="2505807"/>
+                  </a:lnTo>
+                  <a:lnTo>
+                    <a:pt x="5272124" y="2506330"/>
+                  </a:lnTo>
+                  <a:lnTo>
+                    <a:pt x="5348592" y="2506853"/>
+                  </a:lnTo>
+                  <a:lnTo>
+                    <a:pt x="5425061" y="2507376"/>
+                  </a:lnTo>
+                  <a:lnTo>
+                    <a:pt x="5501529" y="2507898"/>
+                  </a:lnTo>
+                  <a:lnTo>
+                    <a:pt x="5577998" y="2508420"/>
+                  </a:lnTo>
+                  <a:lnTo>
+                    <a:pt x="5654466" y="2508942"/>
+                  </a:lnTo>
+                  <a:lnTo>
+                    <a:pt x="5730934" y="2509463"/>
+                  </a:lnTo>
+                  <a:lnTo>
+                    <a:pt x="5807403" y="2509984"/>
+                  </a:lnTo>
+                  <a:lnTo>
+                    <a:pt x="5883871" y="2510504"/>
+                  </a:lnTo>
+                  <a:lnTo>
+                    <a:pt x="5960340" y="2511024"/>
+                  </a:lnTo>
+                  <a:lnTo>
+                    <a:pt x="6036808" y="2511544"/>
+                  </a:lnTo>
+                  <a:lnTo>
+                    <a:pt x="6113277" y="2512064"/>
+                  </a:lnTo>
+                  <a:lnTo>
+                    <a:pt x="6189745" y="2512583"/>
+                  </a:lnTo>
+                  <a:lnTo>
+                    <a:pt x="6266213" y="2513102"/>
+                  </a:lnTo>
+                  <a:lnTo>
+                    <a:pt x="6342682" y="2513620"/>
+                  </a:lnTo>
+                  <a:lnTo>
+                    <a:pt x="6419150" y="2514138"/>
+                  </a:lnTo>
+                  <a:lnTo>
+                    <a:pt x="6495619" y="2514656"/>
+                  </a:lnTo>
+                  <a:lnTo>
+                    <a:pt x="6572087" y="2515173"/>
+                  </a:lnTo>
+                  <a:lnTo>
+                    <a:pt x="6648556" y="2515690"/>
+                  </a:lnTo>
+                  <a:lnTo>
+                    <a:pt x="6725024" y="2516207"/>
+                  </a:lnTo>
+                  <a:lnTo>
+                    <a:pt x="6801492" y="2516723"/>
+                  </a:lnTo>
+                  <a:lnTo>
+                    <a:pt x="6877961" y="2517239"/>
+                  </a:lnTo>
+                  <a:lnTo>
+                    <a:pt x="6954429" y="2517754"/>
+                  </a:lnTo>
+                  <a:lnTo>
+                    <a:pt x="7030898" y="2518270"/>
+                  </a:lnTo>
+                  <a:lnTo>
+                    <a:pt x="7107366" y="2518784"/>
+                  </a:lnTo>
+                  <a:lnTo>
+                    <a:pt x="7183835" y="2519299"/>
+                  </a:lnTo>
+                  <a:lnTo>
+                    <a:pt x="7260303" y="2519813"/>
+                  </a:lnTo>
+                  <a:lnTo>
+                    <a:pt x="7260303" y="3189618"/>
+                  </a:lnTo>
+                  <a:lnTo>
+                    <a:pt x="7183835" y="3185931"/>
+                  </a:lnTo>
+                  <a:lnTo>
+                    <a:pt x="7107366" y="3182080"/>
+                  </a:lnTo>
+                  <a:lnTo>
+                    <a:pt x="7030898" y="3178056"/>
+                  </a:lnTo>
+                  <a:lnTo>
+                    <a:pt x="6954429" y="3173853"/>
+                  </a:lnTo>
+                  <a:lnTo>
+                    <a:pt x="6877961" y="3169461"/>
+                  </a:lnTo>
+                  <a:lnTo>
+                    <a:pt x="6801492" y="3164873"/>
+                  </a:lnTo>
+                  <a:lnTo>
+                    <a:pt x="6725024" y="3160079"/>
+                  </a:lnTo>
+                  <a:lnTo>
+                    <a:pt x="6648556" y="3155071"/>
+                  </a:lnTo>
+                  <a:lnTo>
+                    <a:pt x="6572087" y="3149839"/>
+                  </a:lnTo>
+                  <a:lnTo>
+                    <a:pt x="6495619" y="3144373"/>
+                  </a:lnTo>
+                  <a:lnTo>
+                    <a:pt x="6419150" y="3138662"/>
+                  </a:lnTo>
+                  <a:lnTo>
+                    <a:pt x="6342682" y="3132696"/>
+                  </a:lnTo>
+                  <a:lnTo>
+                    <a:pt x="6266213" y="3126463"/>
+                  </a:lnTo>
+                  <a:lnTo>
+                    <a:pt x="6189745" y="3119951"/>
+                  </a:lnTo>
+                  <a:lnTo>
+                    <a:pt x="6113277" y="3113148"/>
+                  </a:lnTo>
+                  <a:lnTo>
+                    <a:pt x="6036808" y="3106040"/>
+                  </a:lnTo>
+                  <a:lnTo>
+                    <a:pt x="5960340" y="3098615"/>
+                  </a:lnTo>
+                  <a:lnTo>
+                    <a:pt x="5883871" y="3090857"/>
+                  </a:lnTo>
+                  <a:lnTo>
+                    <a:pt x="5807403" y="3082752"/>
+                  </a:lnTo>
+                  <a:lnTo>
+                    <a:pt x="5730934" y="3074284"/>
+                  </a:lnTo>
+                  <a:lnTo>
+                    <a:pt x="5654466" y="3065438"/>
+                  </a:lnTo>
+                  <a:lnTo>
+                    <a:pt x="5577998" y="3056195"/>
+                  </a:lnTo>
+                  <a:lnTo>
+                    <a:pt x="5501529" y="3046540"/>
+                  </a:lnTo>
+                  <a:lnTo>
+                    <a:pt x="5425061" y="3036452"/>
+                  </a:lnTo>
+                  <a:lnTo>
+                    <a:pt x="5348592" y="3025913"/>
+                  </a:lnTo>
+                  <a:lnTo>
+                    <a:pt x="5272124" y="3014902"/>
+                  </a:lnTo>
+                  <a:lnTo>
+                    <a:pt x="5195655" y="3003399"/>
+                  </a:lnTo>
+                  <a:lnTo>
+                    <a:pt x="5119187" y="2991381"/>
+                  </a:lnTo>
+                  <a:lnTo>
+                    <a:pt x="5042719" y="2978826"/>
+                  </a:lnTo>
+                  <a:lnTo>
+                    <a:pt x="4966250" y="2965709"/>
+                  </a:lnTo>
+                  <a:lnTo>
+                    <a:pt x="4889782" y="2952005"/>
+                  </a:lnTo>
+                  <a:lnTo>
+                    <a:pt x="4813313" y="2937687"/>
+                  </a:lnTo>
+                  <a:lnTo>
+                    <a:pt x="4736845" y="2922730"/>
+                  </a:lnTo>
+                  <a:lnTo>
+                    <a:pt x="4660376" y="2907103"/>
+                  </a:lnTo>
+                  <a:lnTo>
+                    <a:pt x="4583908" y="2890776"/>
+                  </a:lnTo>
+                  <a:lnTo>
+                    <a:pt x="4507439" y="2873720"/>
+                  </a:lnTo>
+                  <a:lnTo>
+                    <a:pt x="4430971" y="2855900"/>
+                  </a:lnTo>
+                  <a:lnTo>
+                    <a:pt x="4354503" y="2837283"/>
+                  </a:lnTo>
+                  <a:lnTo>
+                    <a:pt x="4278034" y="2817833"/>
+                  </a:lnTo>
+                  <a:lnTo>
+                    <a:pt x="4201566" y="2797513"/>
+                  </a:lnTo>
+                  <a:lnTo>
+                    <a:pt x="4125097" y="2776284"/>
+                  </a:lnTo>
+                  <a:lnTo>
+                    <a:pt x="4048629" y="2754105"/>
+                  </a:lnTo>
+                  <a:lnTo>
+                    <a:pt x="3972160" y="2730934"/>
+                  </a:lnTo>
+                  <a:lnTo>
+                    <a:pt x="3895692" y="2706726"/>
+                  </a:lnTo>
+                  <a:lnTo>
+                    <a:pt x="3819224" y="2681435"/>
+                  </a:lnTo>
+                  <a:lnTo>
+                    <a:pt x="3742755" y="2655013"/>
+                  </a:lnTo>
+                  <a:lnTo>
+                    <a:pt x="3666287" y="2627408"/>
+                  </a:lnTo>
+                  <a:lnTo>
+                    <a:pt x="3589818" y="2598569"/>
+                  </a:lnTo>
+                  <a:lnTo>
+                    <a:pt x="3513350" y="2568439"/>
+                  </a:lnTo>
+                  <a:lnTo>
+                    <a:pt x="3436881" y="2536961"/>
+                  </a:lnTo>
+                  <a:lnTo>
+                    <a:pt x="3360413" y="2504074"/>
+                  </a:lnTo>
+                  <a:lnTo>
+                    <a:pt x="3283945" y="2492605"/>
+                  </a:lnTo>
+                  <a:lnTo>
+                    <a:pt x="3207476" y="2492072"/>
+                  </a:lnTo>
+                  <a:lnTo>
+                    <a:pt x="3131008" y="2491539"/>
+                  </a:lnTo>
+                  <a:lnTo>
+                    <a:pt x="3054539" y="2491006"/>
+                  </a:lnTo>
+                  <a:lnTo>
+                    <a:pt x="2978071" y="2490472"/>
+                  </a:lnTo>
+                  <a:lnTo>
+                    <a:pt x="2901602" y="2489938"/>
+                  </a:lnTo>
+                  <a:lnTo>
+                    <a:pt x="2825134" y="2489403"/>
+                  </a:lnTo>
+                  <a:lnTo>
+                    <a:pt x="2748666" y="2488868"/>
+                  </a:lnTo>
+                  <a:lnTo>
+                    <a:pt x="2672197" y="2488333"/>
+                  </a:lnTo>
+                  <a:lnTo>
+                    <a:pt x="2595729" y="2487797"/>
+                  </a:lnTo>
+                  <a:lnTo>
+                    <a:pt x="2519260" y="2487261"/>
+                  </a:lnTo>
+                  <a:lnTo>
+                    <a:pt x="2442792" y="2486725"/>
+                  </a:lnTo>
+                  <a:lnTo>
+                    <a:pt x="2366323" y="2486188"/>
+                  </a:lnTo>
+                  <a:lnTo>
+                    <a:pt x="2289855" y="2485651"/>
+                  </a:lnTo>
+                  <a:lnTo>
+                    <a:pt x="2213386" y="2485113"/>
+                  </a:lnTo>
+                  <a:lnTo>
+                    <a:pt x="2136918" y="2484575"/>
+                  </a:lnTo>
+                  <a:lnTo>
+                    <a:pt x="2060450" y="2484037"/>
+                  </a:lnTo>
+                  <a:lnTo>
+                    <a:pt x="1983981" y="2483499"/>
+                  </a:lnTo>
+                  <a:lnTo>
+                    <a:pt x="1907513" y="2482960"/>
+                  </a:lnTo>
+                  <a:lnTo>
+                    <a:pt x="1831044" y="2482420"/>
+                  </a:lnTo>
+                  <a:lnTo>
+                    <a:pt x="1754576" y="2481881"/>
+                  </a:lnTo>
+                  <a:lnTo>
+                    <a:pt x="1678107" y="2481340"/>
+                  </a:lnTo>
+                  <a:lnTo>
+                    <a:pt x="1601639" y="2480800"/>
+                  </a:lnTo>
+                  <a:lnTo>
+                    <a:pt x="1525171" y="2480259"/>
+                  </a:lnTo>
+                  <a:lnTo>
+                    <a:pt x="1448702" y="2479718"/>
+                  </a:lnTo>
+                  <a:lnTo>
+                    <a:pt x="1372234" y="2479176"/>
+                  </a:lnTo>
+                  <a:lnTo>
+                    <a:pt x="1295765" y="2478634"/>
+                  </a:lnTo>
+                  <a:lnTo>
+                    <a:pt x="1219297" y="2478092"/>
+                  </a:lnTo>
+                  <a:lnTo>
+                    <a:pt x="1142828" y="2477549"/>
+                  </a:lnTo>
+                  <a:lnTo>
+                    <a:pt x="1066360" y="2477006"/>
+                  </a:lnTo>
+                  <a:lnTo>
+                    <a:pt x="989892" y="2476463"/>
+                  </a:lnTo>
+                  <a:lnTo>
+                    <a:pt x="913423" y="2475919"/>
+                  </a:lnTo>
+                  <a:lnTo>
+                    <a:pt x="836955" y="2475375"/>
+                  </a:lnTo>
+                  <a:lnTo>
+                    <a:pt x="760486" y="2474831"/>
+                  </a:lnTo>
+                  <a:lnTo>
+                    <a:pt x="684018" y="2474286"/>
+                  </a:lnTo>
+                  <a:lnTo>
+                    <a:pt x="607549" y="2473740"/>
+                  </a:lnTo>
+                  <a:lnTo>
+                    <a:pt x="531081" y="2473195"/>
+                  </a:lnTo>
+                  <a:lnTo>
+                    <a:pt x="454613" y="2472649"/>
+                  </a:lnTo>
+                  <a:lnTo>
+                    <a:pt x="378144" y="2472102"/>
+                  </a:lnTo>
+                  <a:lnTo>
+                    <a:pt x="301676" y="2471555"/>
+                  </a:lnTo>
+                  <a:lnTo>
+                    <a:pt x="225207" y="2471008"/>
+                  </a:lnTo>
+                  <a:lnTo>
+                    <a:pt x="148739" y="2470461"/>
+                  </a:lnTo>
+                  <a:lnTo>
+                    <a:pt x="72270" y="2469913"/>
+                  </a:lnTo>
+                  <a:lnTo>
+                    <a:pt x="0" y="2469395"/>
                   </a:lnTo>
                   <a:close/>
                 </a:path>
@@ -3573,276 +3960,276 @@
         </p:sp>
         <p:sp>
           <p:nvSpPr>
-            <p:cNvPr id="22" name="pl22"/>
+            <p:cNvPr id="31" name="pl31"/>
             <p:cNvSpPr/>
             <p:nvPr/>
           </p:nvSpPr>
           <p:spPr>
             <a:xfrm>
-              <a:off x="1743852" y="2209169"/>
-              <a:ext cx="6432096" cy="2473164"/>
+              <a:off x="1743852" y="2185486"/>
+              <a:ext cx="6432096" cy="2519813"/>
             </a:xfrm>
             <a:custGeom>
               <a:avLst/>
               <a:pathLst>
-                <a:path w="6432096" h="2473164">
+                <a:path w="6432096" h="2519813">
                   <a:moveTo>
                     <a:pt x="0" y="0"/>
                   </a:moveTo>
                   <a:lnTo>
-                    <a:pt x="8748" y="16353"/>
-                  </a:lnTo>
-                  <a:lnTo>
-                    <a:pt x="85216" y="153180"/>
-                  </a:lnTo>
-                  <a:lnTo>
-                    <a:pt x="161685" y="284147"/>
-                  </a:lnTo>
-                  <a:lnTo>
-                    <a:pt x="238153" y="409505"/>
-                  </a:lnTo>
-                  <a:lnTo>
-                    <a:pt x="314621" y="529495"/>
-                  </a:lnTo>
-                  <a:lnTo>
-                    <a:pt x="391090" y="644347"/>
-                  </a:lnTo>
-                  <a:lnTo>
-                    <a:pt x="467558" y="754280"/>
-                  </a:lnTo>
-                  <a:lnTo>
-                    <a:pt x="544027" y="859505"/>
-                  </a:lnTo>
-                  <a:lnTo>
-                    <a:pt x="620495" y="960225"/>
-                  </a:lnTo>
-                  <a:lnTo>
-                    <a:pt x="696964" y="1056631"/>
-                  </a:lnTo>
-                  <a:lnTo>
-                    <a:pt x="773432" y="1148908"/>
-                  </a:lnTo>
-                  <a:lnTo>
-                    <a:pt x="849900" y="1237234"/>
-                  </a:lnTo>
-                  <a:lnTo>
-                    <a:pt x="926369" y="1321778"/>
-                  </a:lnTo>
-                  <a:lnTo>
-                    <a:pt x="1002837" y="1402701"/>
-                  </a:lnTo>
-                  <a:lnTo>
-                    <a:pt x="1079306" y="1480158"/>
-                  </a:lnTo>
-                  <a:lnTo>
-                    <a:pt x="1155774" y="1554298"/>
-                  </a:lnTo>
-                  <a:lnTo>
-                    <a:pt x="1232243" y="1625264"/>
-                  </a:lnTo>
-                  <a:lnTo>
-                    <a:pt x="1308711" y="1693190"/>
-                  </a:lnTo>
-                  <a:lnTo>
-                    <a:pt x="1385180" y="1758208"/>
-                  </a:lnTo>
-                  <a:lnTo>
-                    <a:pt x="1461648" y="1820441"/>
-                  </a:lnTo>
-                  <a:lnTo>
-                    <a:pt x="1538116" y="1880009"/>
-                  </a:lnTo>
-                  <a:lnTo>
-                    <a:pt x="1614585" y="1937026"/>
-                  </a:lnTo>
-                  <a:lnTo>
-                    <a:pt x="1691053" y="1991602"/>
-                  </a:lnTo>
-                  <a:lnTo>
-                    <a:pt x="1767522" y="2043840"/>
-                  </a:lnTo>
-                  <a:lnTo>
-                    <a:pt x="1843990" y="2093842"/>
-                  </a:lnTo>
-                  <a:lnTo>
-                    <a:pt x="1920459" y="2141702"/>
-                  </a:lnTo>
-                  <a:lnTo>
-                    <a:pt x="1996927" y="2187512"/>
-                  </a:lnTo>
-                  <a:lnTo>
-                    <a:pt x="2073395" y="2231361"/>
-                  </a:lnTo>
-                  <a:lnTo>
-                    <a:pt x="2149864" y="2273332"/>
-                  </a:lnTo>
-                  <a:lnTo>
-                    <a:pt x="2226332" y="2313505"/>
-                  </a:lnTo>
-                  <a:lnTo>
-                    <a:pt x="2302801" y="2351958"/>
-                  </a:lnTo>
-                  <a:lnTo>
-                    <a:pt x="2379269" y="2388765"/>
-                  </a:lnTo>
-                  <a:lnTo>
-                    <a:pt x="2455738" y="2423995"/>
-                  </a:lnTo>
-                  <a:lnTo>
-                    <a:pt x="2532206" y="2446982"/>
-                  </a:lnTo>
-                  <a:lnTo>
-                    <a:pt x="2608674" y="2447504"/>
-                  </a:lnTo>
-                  <a:lnTo>
-                    <a:pt x="2685143" y="2448026"/>
-                  </a:lnTo>
-                  <a:lnTo>
-                    <a:pt x="2761611" y="2448548"/>
-                  </a:lnTo>
-                  <a:lnTo>
-                    <a:pt x="2838080" y="2449069"/>
-                  </a:lnTo>
-                  <a:lnTo>
-                    <a:pt x="2914548" y="2449590"/>
-                  </a:lnTo>
-                  <a:lnTo>
-                    <a:pt x="2991017" y="2450110"/>
-                  </a:lnTo>
-                  <a:lnTo>
-                    <a:pt x="3067485" y="2450630"/>
-                  </a:lnTo>
-                  <a:lnTo>
-                    <a:pt x="3143953" y="2451150"/>
-                  </a:lnTo>
-                  <a:lnTo>
-                    <a:pt x="3220422" y="2451669"/>
-                  </a:lnTo>
-                  <a:lnTo>
-                    <a:pt x="3296890" y="2452188"/>
-                  </a:lnTo>
-                  <a:lnTo>
-                    <a:pt x="3373359" y="2452707"/>
-                  </a:lnTo>
-                  <a:lnTo>
-                    <a:pt x="3449827" y="2453225"/>
-                  </a:lnTo>
-                  <a:lnTo>
-                    <a:pt x="3526296" y="2453743"/>
-                  </a:lnTo>
-                  <a:lnTo>
-                    <a:pt x="3602764" y="2454260"/>
-                  </a:lnTo>
-                  <a:lnTo>
-                    <a:pt x="3679233" y="2454778"/>
-                  </a:lnTo>
-                  <a:lnTo>
-                    <a:pt x="3755701" y="2455294"/>
-                  </a:lnTo>
-                  <a:lnTo>
-                    <a:pt x="3832169" y="2455811"/>
-                  </a:lnTo>
-                  <a:lnTo>
-                    <a:pt x="3908638" y="2456327"/>
-                  </a:lnTo>
-                  <a:lnTo>
-                    <a:pt x="3985106" y="2456843"/>
-                  </a:lnTo>
-                  <a:lnTo>
-                    <a:pt x="4061575" y="2457358"/>
-                  </a:lnTo>
-                  <a:lnTo>
-                    <a:pt x="4138043" y="2457873"/>
-                  </a:lnTo>
-                  <a:lnTo>
-                    <a:pt x="4214512" y="2458388"/>
-                  </a:lnTo>
-                  <a:lnTo>
-                    <a:pt x="4290980" y="2458903"/>
-                  </a:lnTo>
-                  <a:lnTo>
-                    <a:pt x="4367448" y="2459417"/>
-                  </a:lnTo>
-                  <a:lnTo>
-                    <a:pt x="4443917" y="2459930"/>
-                  </a:lnTo>
-                  <a:lnTo>
-                    <a:pt x="4520385" y="2460444"/>
-                  </a:lnTo>
-                  <a:lnTo>
-                    <a:pt x="4596854" y="2460957"/>
-                  </a:lnTo>
-                  <a:lnTo>
-                    <a:pt x="4673322" y="2461469"/>
-                  </a:lnTo>
-                  <a:lnTo>
-                    <a:pt x="4749791" y="2461982"/>
-                  </a:lnTo>
-                  <a:lnTo>
-                    <a:pt x="4826259" y="2462493"/>
-                  </a:lnTo>
-                  <a:lnTo>
-                    <a:pt x="4902727" y="2463005"/>
-                  </a:lnTo>
-                  <a:lnTo>
-                    <a:pt x="4979196" y="2463516"/>
-                  </a:lnTo>
-                  <a:lnTo>
-                    <a:pt x="5055664" y="2464027"/>
-                  </a:lnTo>
-                  <a:lnTo>
-                    <a:pt x="5132133" y="2464538"/>
-                  </a:lnTo>
-                  <a:lnTo>
-                    <a:pt x="5208601" y="2465048"/>
-                  </a:lnTo>
-                  <a:lnTo>
-                    <a:pt x="5285070" y="2465558"/>
-                  </a:lnTo>
-                  <a:lnTo>
-                    <a:pt x="5361538" y="2466067"/>
-                  </a:lnTo>
-                  <a:lnTo>
-                    <a:pt x="5438006" y="2466576"/>
-                  </a:lnTo>
-                  <a:lnTo>
-                    <a:pt x="5514475" y="2467085"/>
-                  </a:lnTo>
-                  <a:lnTo>
-                    <a:pt x="5590943" y="2467594"/>
-                  </a:lnTo>
-                  <a:lnTo>
-                    <a:pt x="5667412" y="2468102"/>
-                  </a:lnTo>
-                  <a:lnTo>
-                    <a:pt x="5743880" y="2468610"/>
-                  </a:lnTo>
-                  <a:lnTo>
-                    <a:pt x="5820349" y="2469117"/>
-                  </a:lnTo>
-                  <a:lnTo>
-                    <a:pt x="5896817" y="2469624"/>
-                  </a:lnTo>
-                  <a:lnTo>
-                    <a:pt x="5973286" y="2470131"/>
-                  </a:lnTo>
-                  <a:lnTo>
-                    <a:pt x="6049754" y="2470637"/>
-                  </a:lnTo>
-                  <a:lnTo>
-                    <a:pt x="6126222" y="2471143"/>
-                  </a:lnTo>
-                  <a:lnTo>
-                    <a:pt x="6202691" y="2471649"/>
-                  </a:lnTo>
-                  <a:lnTo>
-                    <a:pt x="6279159" y="2472154"/>
-                  </a:lnTo>
-                  <a:lnTo>
-                    <a:pt x="6355628" y="2472659"/>
-                  </a:lnTo>
-                  <a:lnTo>
-                    <a:pt x="6432096" y="2473164"/>
+                    <a:pt x="8748" y="16662"/>
+                  </a:lnTo>
+                  <a:lnTo>
+                    <a:pt x="85216" y="156069"/>
+                  </a:lnTo>
+                  <a:lnTo>
+                    <a:pt x="161685" y="289506"/>
+                  </a:lnTo>
+                  <a:lnTo>
+                    <a:pt x="238153" y="417229"/>
+                  </a:lnTo>
+                  <a:lnTo>
+                    <a:pt x="314621" y="539483"/>
+                  </a:lnTo>
+                  <a:lnTo>
+                    <a:pt x="391090" y="656501"/>
+                  </a:lnTo>
+                  <a:lnTo>
+                    <a:pt x="467558" y="768507"/>
+                  </a:lnTo>
+                  <a:lnTo>
+                    <a:pt x="544027" y="875718"/>
+                  </a:lnTo>
+                  <a:lnTo>
+                    <a:pt x="620495" y="978337"/>
+                  </a:lnTo>
+                  <a:lnTo>
+                    <a:pt x="696964" y="1076561"/>
+                  </a:lnTo>
+                  <a:lnTo>
+                    <a:pt x="773432" y="1170579"/>
+                  </a:lnTo>
+                  <a:lnTo>
+                    <a:pt x="849900" y="1260571"/>
+                  </a:lnTo>
+                  <a:lnTo>
+                    <a:pt x="926369" y="1346709"/>
+                  </a:lnTo>
+                  <a:lnTo>
+                    <a:pt x="1002837" y="1429159"/>
+                  </a:lnTo>
+                  <a:lnTo>
+                    <a:pt x="1079306" y="1508077"/>
+                  </a:lnTo>
+                  <a:lnTo>
+                    <a:pt x="1155774" y="1583616"/>
+                  </a:lnTo>
+                  <a:lnTo>
+                    <a:pt x="1232243" y="1655920"/>
+                  </a:lnTo>
+                  <a:lnTo>
+                    <a:pt x="1308711" y="1725128"/>
+                  </a:lnTo>
+                  <a:lnTo>
+                    <a:pt x="1385180" y="1791372"/>
+                  </a:lnTo>
+                  <a:lnTo>
+                    <a:pt x="1461648" y="1854779"/>
+                  </a:lnTo>
+                  <a:lnTo>
+                    <a:pt x="1538116" y="1915470"/>
+                  </a:lnTo>
+                  <a:lnTo>
+                    <a:pt x="1614585" y="1973563"/>
+                  </a:lnTo>
+                  <a:lnTo>
+                    <a:pt x="1691053" y="2029168"/>
+                  </a:lnTo>
+                  <a:lnTo>
+                    <a:pt x="1767522" y="2082392"/>
+                  </a:lnTo>
+                  <a:lnTo>
+                    <a:pt x="1843990" y="2133336"/>
+                  </a:lnTo>
+                  <a:lnTo>
+                    <a:pt x="1920459" y="2182099"/>
+                  </a:lnTo>
+                  <a:lnTo>
+                    <a:pt x="1996927" y="2228773"/>
+                  </a:lnTo>
+                  <a:lnTo>
+                    <a:pt x="2073395" y="2273449"/>
+                  </a:lnTo>
+                  <a:lnTo>
+                    <a:pt x="2149864" y="2316212"/>
+                  </a:lnTo>
+                  <a:lnTo>
+                    <a:pt x="2226332" y="2357143"/>
+                  </a:lnTo>
+                  <a:lnTo>
+                    <a:pt x="2302801" y="2396321"/>
+                  </a:lnTo>
+                  <a:lnTo>
+                    <a:pt x="2379269" y="2433822"/>
+                  </a:lnTo>
+                  <a:lnTo>
+                    <a:pt x="2455738" y="2469717"/>
+                  </a:lnTo>
+                  <a:lnTo>
+                    <a:pt x="2532206" y="2493138"/>
+                  </a:lnTo>
+                  <a:lnTo>
+                    <a:pt x="2608674" y="2493670"/>
+                  </a:lnTo>
+                  <a:lnTo>
+                    <a:pt x="2685143" y="2494201"/>
+                  </a:lnTo>
+                  <a:lnTo>
+                    <a:pt x="2761611" y="2494733"/>
+                  </a:lnTo>
+                  <a:lnTo>
+                    <a:pt x="2838080" y="2495264"/>
+                  </a:lnTo>
+                  <a:lnTo>
+                    <a:pt x="2914548" y="2495794"/>
+                  </a:lnTo>
+                  <a:lnTo>
+                    <a:pt x="2991017" y="2496324"/>
+                  </a:lnTo>
+                  <a:lnTo>
+                    <a:pt x="3067485" y="2496854"/>
+                  </a:lnTo>
+                  <a:lnTo>
+                    <a:pt x="3143953" y="2497384"/>
+                  </a:lnTo>
+                  <a:lnTo>
+                    <a:pt x="3220422" y="2497913"/>
+                  </a:lnTo>
+                  <a:lnTo>
+                    <a:pt x="3296890" y="2498442"/>
+                  </a:lnTo>
+                  <a:lnTo>
+                    <a:pt x="3373359" y="2498970"/>
+                  </a:lnTo>
+                  <a:lnTo>
+                    <a:pt x="3449827" y="2499498"/>
+                  </a:lnTo>
+                  <a:lnTo>
+                    <a:pt x="3526296" y="2500026"/>
+                  </a:lnTo>
+                  <a:lnTo>
+                    <a:pt x="3602764" y="2500553"/>
+                  </a:lnTo>
+                  <a:lnTo>
+                    <a:pt x="3679233" y="2501080"/>
+                  </a:lnTo>
+                  <a:lnTo>
+                    <a:pt x="3755701" y="2501607"/>
+                  </a:lnTo>
+                  <a:lnTo>
+                    <a:pt x="3832169" y="2502133"/>
+                  </a:lnTo>
+                  <a:lnTo>
+                    <a:pt x="3908638" y="2502659"/>
+                  </a:lnTo>
+                  <a:lnTo>
+                    <a:pt x="3985106" y="2503184"/>
+                  </a:lnTo>
+                  <a:lnTo>
+                    <a:pt x="4061575" y="2503710"/>
+                  </a:lnTo>
+                  <a:lnTo>
+                    <a:pt x="4138043" y="2504234"/>
+                  </a:lnTo>
+                  <a:lnTo>
+                    <a:pt x="4214512" y="2504759"/>
+                  </a:lnTo>
+                  <a:lnTo>
+                    <a:pt x="4290980" y="2505283"/>
+                  </a:lnTo>
+                  <a:lnTo>
+                    <a:pt x="4367448" y="2505807"/>
+                  </a:lnTo>
+                  <a:lnTo>
+                    <a:pt x="4443917" y="2506330"/>
+                  </a:lnTo>
+                  <a:lnTo>
+                    <a:pt x="4520385" y="2506853"/>
+                  </a:lnTo>
+                  <a:lnTo>
+                    <a:pt x="4596854" y="2507376"/>
+                  </a:lnTo>
+                  <a:lnTo>
+                    <a:pt x="4673322" y="2507898"/>
+                  </a:lnTo>
+                  <a:lnTo>
+                    <a:pt x="4749791" y="2508420"/>
+                  </a:lnTo>
+                  <a:lnTo>
+                    <a:pt x="4826259" y="2508942"/>
+                  </a:lnTo>
+                  <a:lnTo>
+                    <a:pt x="4902727" y="2509463"/>
+                  </a:lnTo>
+                  <a:lnTo>
+                    <a:pt x="4979196" y="2509984"/>
+                  </a:lnTo>
+                  <a:lnTo>
+                    <a:pt x="5055664" y="2510504"/>
+                  </a:lnTo>
+                  <a:lnTo>
+                    <a:pt x="5132133" y="2511024"/>
+                  </a:lnTo>
+                  <a:lnTo>
+                    <a:pt x="5208601" y="2511544"/>
+                  </a:lnTo>
+                  <a:lnTo>
+                    <a:pt x="5285070" y="2512064"/>
+                  </a:lnTo>
+                  <a:lnTo>
+                    <a:pt x="5361538" y="2512583"/>
+                  </a:lnTo>
+                  <a:lnTo>
+                    <a:pt x="5438006" y="2513102"/>
+                  </a:lnTo>
+                  <a:lnTo>
+                    <a:pt x="5514475" y="2513620"/>
+                  </a:lnTo>
+                  <a:lnTo>
+                    <a:pt x="5590943" y="2514138"/>
+                  </a:lnTo>
+                  <a:lnTo>
+                    <a:pt x="5667412" y="2514656"/>
+                  </a:lnTo>
+                  <a:lnTo>
+                    <a:pt x="5743880" y="2515173"/>
+                  </a:lnTo>
+                  <a:lnTo>
+                    <a:pt x="5820349" y="2515690"/>
+                  </a:lnTo>
+                  <a:lnTo>
+                    <a:pt x="5896817" y="2516207"/>
+                  </a:lnTo>
+                  <a:lnTo>
+                    <a:pt x="5973286" y="2516723"/>
+                  </a:lnTo>
+                  <a:lnTo>
+                    <a:pt x="6049754" y="2517239"/>
+                  </a:lnTo>
+                  <a:lnTo>
+                    <a:pt x="6126222" y="2517754"/>
+                  </a:lnTo>
+                  <a:lnTo>
+                    <a:pt x="6202691" y="2518270"/>
+                  </a:lnTo>
+                  <a:lnTo>
+                    <a:pt x="6279159" y="2518784"/>
+                  </a:lnTo>
+                  <a:lnTo>
+                    <a:pt x="6355628" y="2519299"/>
+                  </a:lnTo>
+                  <a:lnTo>
+                    <a:pt x="6432096" y="2519813"/>
                   </a:lnTo>
                 </a:path>
               </a:pathLst>
@@ -3856,303 +4243,303 @@
         </p:sp>
         <p:sp>
           <p:nvSpPr>
-            <p:cNvPr id="23" name="pl23"/>
+            <p:cNvPr id="32" name="pl32"/>
             <p:cNvSpPr/>
             <p:nvPr/>
           </p:nvSpPr>
           <p:spPr>
             <a:xfrm>
-              <a:off x="915645" y="4632848"/>
-              <a:ext cx="7260303" cy="706889"/>
+              <a:off x="915645" y="4654881"/>
+              <a:ext cx="7260303" cy="720222"/>
             </a:xfrm>
             <a:custGeom>
               <a:avLst/>
               <a:pathLst>
-                <a:path w="7260303" h="706889">
+                <a:path w="7260303" h="720222">
                   <a:moveTo>
-                    <a:pt x="7260303" y="706889"/>
+                    <a:pt x="7260303" y="720222"/>
                   </a:moveTo>
                   <a:lnTo>
-                    <a:pt x="7183835" y="703271"/>
-                  </a:lnTo>
-                  <a:lnTo>
-                    <a:pt x="7107366" y="699491"/>
-                  </a:lnTo>
-                  <a:lnTo>
-                    <a:pt x="7030898" y="695542"/>
-                  </a:lnTo>
-                  <a:lnTo>
-                    <a:pt x="6954429" y="691416"/>
-                  </a:lnTo>
-                  <a:lnTo>
-                    <a:pt x="6877961" y="687105"/>
-                  </a:lnTo>
-                  <a:lnTo>
-                    <a:pt x="6801492" y="682602"/>
-                  </a:lnTo>
-                  <a:lnTo>
-                    <a:pt x="6725024" y="677897"/>
-                  </a:lnTo>
-                  <a:lnTo>
-                    <a:pt x="6648556" y="672982"/>
-                  </a:lnTo>
-                  <a:lnTo>
-                    <a:pt x="6572087" y="667847"/>
-                  </a:lnTo>
-                  <a:lnTo>
-                    <a:pt x="6495619" y="662482"/>
-                  </a:lnTo>
-                  <a:lnTo>
-                    <a:pt x="6419150" y="656877"/>
-                  </a:lnTo>
-                  <a:lnTo>
-                    <a:pt x="6342682" y="651021"/>
-                  </a:lnTo>
-                  <a:lnTo>
-                    <a:pt x="6266213" y="644904"/>
-                  </a:lnTo>
-                  <a:lnTo>
-                    <a:pt x="6189745" y="638512"/>
-                  </a:lnTo>
-                  <a:lnTo>
-                    <a:pt x="6113277" y="631835"/>
-                  </a:lnTo>
-                  <a:lnTo>
-                    <a:pt x="6036808" y="624859"/>
-                  </a:lnTo>
-                  <a:lnTo>
-                    <a:pt x="5960340" y="617571"/>
-                  </a:lnTo>
-                  <a:lnTo>
-                    <a:pt x="5883871" y="609956"/>
-                  </a:lnTo>
-                  <a:lnTo>
-                    <a:pt x="5807403" y="602001"/>
-                  </a:lnTo>
-                  <a:lnTo>
-                    <a:pt x="5730934" y="593691"/>
-                  </a:lnTo>
-                  <a:lnTo>
-                    <a:pt x="5654466" y="585008"/>
-                  </a:lnTo>
-                  <a:lnTo>
-                    <a:pt x="5577998" y="575937"/>
-                  </a:lnTo>
-                  <a:lnTo>
-                    <a:pt x="5501529" y="566460"/>
-                  </a:lnTo>
-                  <a:lnTo>
-                    <a:pt x="5425061" y="556559"/>
-                  </a:lnTo>
-                  <a:lnTo>
-                    <a:pt x="5348592" y="546215"/>
-                  </a:lnTo>
-                  <a:lnTo>
-                    <a:pt x="5272124" y="535408"/>
-                  </a:lnTo>
-                  <a:lnTo>
-                    <a:pt x="5195655" y="524118"/>
-                  </a:lnTo>
-                  <a:lnTo>
-                    <a:pt x="5119187" y="512323"/>
-                  </a:lnTo>
-                  <a:lnTo>
-                    <a:pt x="5042719" y="500000"/>
-                  </a:lnTo>
-                  <a:lnTo>
-                    <a:pt x="4966250" y="487125"/>
-                  </a:lnTo>
-                  <a:lnTo>
-                    <a:pt x="4889782" y="473675"/>
-                  </a:lnTo>
-                  <a:lnTo>
-                    <a:pt x="4813313" y="459623"/>
-                  </a:lnTo>
-                  <a:lnTo>
-                    <a:pt x="4736845" y="444942"/>
-                  </a:lnTo>
-                  <a:lnTo>
-                    <a:pt x="4660376" y="429604"/>
-                  </a:lnTo>
-                  <a:lnTo>
-                    <a:pt x="4583908" y="413580"/>
-                  </a:lnTo>
-                  <a:lnTo>
-                    <a:pt x="4507439" y="396839"/>
-                  </a:lnTo>
-                  <a:lnTo>
-                    <a:pt x="4430971" y="379350"/>
-                  </a:lnTo>
-                  <a:lnTo>
-                    <a:pt x="4354503" y="361077"/>
-                  </a:lnTo>
-                  <a:lnTo>
-                    <a:pt x="4278034" y="341988"/>
-                  </a:lnTo>
-                  <a:lnTo>
-                    <a:pt x="4201566" y="322044"/>
-                  </a:lnTo>
-                  <a:lnTo>
-                    <a:pt x="4125097" y="301208"/>
-                  </a:lnTo>
-                  <a:lnTo>
-                    <a:pt x="4048629" y="279439"/>
-                  </a:lnTo>
-                  <a:lnTo>
-                    <a:pt x="3972160" y="256697"/>
-                  </a:lnTo>
-                  <a:lnTo>
-                    <a:pt x="3895692" y="232937"/>
-                  </a:lnTo>
-                  <a:lnTo>
-                    <a:pt x="3819224" y="208115"/>
-                  </a:lnTo>
-                  <a:lnTo>
-                    <a:pt x="3742755" y="182181"/>
-                  </a:lnTo>
-                  <a:lnTo>
-                    <a:pt x="3666287" y="155088"/>
-                  </a:lnTo>
-                  <a:lnTo>
-                    <a:pt x="3589818" y="126782"/>
-                  </a:lnTo>
-                  <a:lnTo>
-                    <a:pt x="3513350" y="97210"/>
-                  </a:lnTo>
-                  <a:lnTo>
-                    <a:pt x="3436881" y="66315"/>
-                  </a:lnTo>
-                  <a:lnTo>
-                    <a:pt x="3360413" y="34037"/>
-                  </a:lnTo>
-                  <a:lnTo>
-                    <a:pt x="3283945" y="22780"/>
-                  </a:lnTo>
-                  <a:lnTo>
-                    <a:pt x="3207476" y="22257"/>
-                  </a:lnTo>
-                  <a:lnTo>
-                    <a:pt x="3131008" y="21734"/>
-                  </a:lnTo>
-                  <a:lnTo>
-                    <a:pt x="3054539" y="21211"/>
-                  </a:lnTo>
-                  <a:lnTo>
-                    <a:pt x="2978071" y="20687"/>
-                  </a:lnTo>
-                  <a:lnTo>
-                    <a:pt x="2901602" y="20162"/>
-                  </a:lnTo>
-                  <a:lnTo>
-                    <a:pt x="2825134" y="19638"/>
-                  </a:lnTo>
-                  <a:lnTo>
-                    <a:pt x="2748666" y="19113"/>
-                  </a:lnTo>
-                  <a:lnTo>
-                    <a:pt x="2672197" y="18587"/>
-                  </a:lnTo>
-                  <a:lnTo>
-                    <a:pt x="2595729" y="18061"/>
-                  </a:lnTo>
-                  <a:lnTo>
-                    <a:pt x="2519260" y="17535"/>
-                  </a:lnTo>
-                  <a:lnTo>
-                    <a:pt x="2442792" y="17009"/>
-                  </a:lnTo>
-                  <a:lnTo>
-                    <a:pt x="2366323" y="16482"/>
-                  </a:lnTo>
-                  <a:lnTo>
-                    <a:pt x="2289855" y="15955"/>
-                  </a:lnTo>
-                  <a:lnTo>
-                    <a:pt x="2213386" y="15427"/>
-                  </a:lnTo>
-                  <a:lnTo>
-                    <a:pt x="2136918" y="14899"/>
-                  </a:lnTo>
-                  <a:lnTo>
-                    <a:pt x="2060450" y="14371"/>
-                  </a:lnTo>
-                  <a:lnTo>
-                    <a:pt x="1983981" y="13842"/>
-                  </a:lnTo>
-                  <a:lnTo>
-                    <a:pt x="1907513" y="13313"/>
-                  </a:lnTo>
-                  <a:lnTo>
-                    <a:pt x="1831044" y="12784"/>
-                  </a:lnTo>
-                  <a:lnTo>
-                    <a:pt x="1754576" y="12254"/>
-                  </a:lnTo>
-                  <a:lnTo>
-                    <a:pt x="1678107" y="11724"/>
-                  </a:lnTo>
-                  <a:lnTo>
-                    <a:pt x="1601639" y="11194"/>
-                  </a:lnTo>
-                  <a:lnTo>
-                    <a:pt x="1525171" y="10663"/>
-                  </a:lnTo>
-                  <a:lnTo>
-                    <a:pt x="1448702" y="10132"/>
-                  </a:lnTo>
-                  <a:lnTo>
-                    <a:pt x="1372234" y="9600"/>
-                  </a:lnTo>
-                  <a:lnTo>
-                    <a:pt x="1295765" y="9068"/>
-                  </a:lnTo>
-                  <a:lnTo>
-                    <a:pt x="1219297" y="8536"/>
-                  </a:lnTo>
-                  <a:lnTo>
-                    <a:pt x="1142828" y="8003"/>
-                  </a:lnTo>
-                  <a:lnTo>
-                    <a:pt x="1066360" y="7470"/>
-                  </a:lnTo>
-                  <a:lnTo>
-                    <a:pt x="989892" y="6937"/>
-                  </a:lnTo>
-                  <a:lnTo>
-                    <a:pt x="913423" y="6403"/>
-                  </a:lnTo>
-                  <a:lnTo>
-                    <a:pt x="836955" y="5869"/>
-                  </a:lnTo>
-                  <a:lnTo>
-                    <a:pt x="760486" y="5335"/>
-                  </a:lnTo>
-                  <a:lnTo>
-                    <a:pt x="684018" y="4800"/>
-                  </a:lnTo>
-                  <a:lnTo>
-                    <a:pt x="607549" y="4265"/>
-                  </a:lnTo>
-                  <a:lnTo>
-                    <a:pt x="531081" y="3729"/>
-                  </a:lnTo>
-                  <a:lnTo>
-                    <a:pt x="454613" y="3193"/>
-                  </a:lnTo>
-                  <a:lnTo>
-                    <a:pt x="378144" y="2657"/>
-                  </a:lnTo>
-                  <a:lnTo>
-                    <a:pt x="301676" y="2120"/>
-                  </a:lnTo>
-                  <a:lnTo>
-                    <a:pt x="225207" y="1583"/>
-                  </a:lnTo>
-                  <a:lnTo>
-                    <a:pt x="148739" y="1046"/>
-                  </a:lnTo>
-                  <a:lnTo>
-                    <a:pt x="72270" y="508"/>
+                    <a:pt x="7183835" y="716536"/>
+                  </a:lnTo>
+                  <a:lnTo>
+                    <a:pt x="7107366" y="712685"/>
+                  </a:lnTo>
+                  <a:lnTo>
+                    <a:pt x="7030898" y="708661"/>
+                  </a:lnTo>
+                  <a:lnTo>
+                    <a:pt x="6954429" y="704457"/>
+                  </a:lnTo>
+                  <a:lnTo>
+                    <a:pt x="6877961" y="700066"/>
+                  </a:lnTo>
+                  <a:lnTo>
+                    <a:pt x="6801492" y="695477"/>
+                  </a:lnTo>
+                  <a:lnTo>
+                    <a:pt x="6725024" y="690684"/>
+                  </a:lnTo>
+                  <a:lnTo>
+                    <a:pt x="6648556" y="685676"/>
+                  </a:lnTo>
+                  <a:lnTo>
+                    <a:pt x="6572087" y="680444"/>
+                  </a:lnTo>
+                  <a:lnTo>
+                    <a:pt x="6495619" y="674978"/>
+                  </a:lnTo>
+                  <a:lnTo>
+                    <a:pt x="6419150" y="669267"/>
+                  </a:lnTo>
+                  <a:lnTo>
+                    <a:pt x="6342682" y="663301"/>
+                  </a:lnTo>
+                  <a:lnTo>
+                    <a:pt x="6266213" y="657068"/>
+                  </a:lnTo>
+                  <a:lnTo>
+                    <a:pt x="6189745" y="650556"/>
+                  </a:lnTo>
+                  <a:lnTo>
+                    <a:pt x="6113277" y="643753"/>
+                  </a:lnTo>
+                  <a:lnTo>
+                    <a:pt x="6036808" y="636645"/>
+                  </a:lnTo>
+                  <a:lnTo>
+                    <a:pt x="5960340" y="629219"/>
+                  </a:lnTo>
+                  <a:lnTo>
+                    <a:pt x="5883871" y="621461"/>
+                  </a:lnTo>
+                  <a:lnTo>
+                    <a:pt x="5807403" y="613356"/>
+                  </a:lnTo>
+                  <a:lnTo>
+                    <a:pt x="5730934" y="604889"/>
+                  </a:lnTo>
+                  <a:lnTo>
+                    <a:pt x="5654466" y="596042"/>
+                  </a:lnTo>
+                  <a:lnTo>
+                    <a:pt x="5577998" y="586800"/>
+                  </a:lnTo>
+                  <a:lnTo>
+                    <a:pt x="5501529" y="577144"/>
+                  </a:lnTo>
+                  <a:lnTo>
+                    <a:pt x="5425061" y="567057"/>
+                  </a:lnTo>
+                  <a:lnTo>
+                    <a:pt x="5348592" y="556518"/>
+                  </a:lnTo>
+                  <a:lnTo>
+                    <a:pt x="5272124" y="545507"/>
+                  </a:lnTo>
+                  <a:lnTo>
+                    <a:pt x="5195655" y="534004"/>
+                  </a:lnTo>
+                  <a:lnTo>
+                    <a:pt x="5119187" y="521986"/>
+                  </a:lnTo>
+                  <a:lnTo>
+                    <a:pt x="5042719" y="509431"/>
+                  </a:lnTo>
+                  <a:lnTo>
+                    <a:pt x="4966250" y="496313"/>
+                  </a:lnTo>
+                  <a:lnTo>
+                    <a:pt x="4889782" y="482609"/>
+                  </a:lnTo>
+                  <a:lnTo>
+                    <a:pt x="4813313" y="468292"/>
+                  </a:lnTo>
+                  <a:lnTo>
+                    <a:pt x="4736845" y="453334"/>
+                  </a:lnTo>
+                  <a:lnTo>
+                    <a:pt x="4660376" y="437707"/>
+                  </a:lnTo>
+                  <a:lnTo>
+                    <a:pt x="4583908" y="421381"/>
+                  </a:lnTo>
+                  <a:lnTo>
+                    <a:pt x="4507439" y="404325"/>
+                  </a:lnTo>
+                  <a:lnTo>
+                    <a:pt x="4430971" y="386505"/>
+                  </a:lnTo>
+                  <a:lnTo>
+                    <a:pt x="4354503" y="367888"/>
+                  </a:lnTo>
+                  <a:lnTo>
+                    <a:pt x="4278034" y="348438"/>
+                  </a:lnTo>
+                  <a:lnTo>
+                    <a:pt x="4201566" y="328118"/>
+                  </a:lnTo>
+                  <a:lnTo>
+                    <a:pt x="4125097" y="306889"/>
+                  </a:lnTo>
+                  <a:lnTo>
+                    <a:pt x="4048629" y="284710"/>
+                  </a:lnTo>
+                  <a:lnTo>
+                    <a:pt x="3972160" y="261539"/>
+                  </a:lnTo>
+                  <a:lnTo>
+                    <a:pt x="3895692" y="237331"/>
+                  </a:lnTo>
+                  <a:lnTo>
+                    <a:pt x="3819224" y="212040"/>
+                  </a:lnTo>
+                  <a:lnTo>
+                    <a:pt x="3742755" y="185618"/>
+                  </a:lnTo>
+                  <a:lnTo>
+                    <a:pt x="3666287" y="158013"/>
+                  </a:lnTo>
+                  <a:lnTo>
+                    <a:pt x="3589818" y="129173"/>
+                  </a:lnTo>
+                  <a:lnTo>
+                    <a:pt x="3513350" y="99043"/>
+                  </a:lnTo>
+                  <a:lnTo>
+                    <a:pt x="3436881" y="67566"/>
+                  </a:lnTo>
+                  <a:lnTo>
+                    <a:pt x="3360413" y="34679"/>
+                  </a:lnTo>
+                  <a:lnTo>
+                    <a:pt x="3283945" y="23210"/>
+                  </a:lnTo>
+                  <a:lnTo>
+                    <a:pt x="3207476" y="22677"/>
+                  </a:lnTo>
+                  <a:lnTo>
+                    <a:pt x="3131008" y="22144"/>
+                  </a:lnTo>
+                  <a:lnTo>
+                    <a:pt x="3054539" y="21611"/>
+                  </a:lnTo>
+                  <a:lnTo>
+                    <a:pt x="2978071" y="21077"/>
+                  </a:lnTo>
+                  <a:lnTo>
+                    <a:pt x="2901602" y="20543"/>
+                  </a:lnTo>
+                  <a:lnTo>
+                    <a:pt x="2825134" y="20008"/>
+                  </a:lnTo>
+                  <a:lnTo>
+                    <a:pt x="2748666" y="19473"/>
+                  </a:lnTo>
+                  <a:lnTo>
+                    <a:pt x="2672197" y="18938"/>
+                  </a:lnTo>
+                  <a:lnTo>
+                    <a:pt x="2595729" y="18402"/>
+                  </a:lnTo>
+                  <a:lnTo>
+                    <a:pt x="2519260" y="17866"/>
+                  </a:lnTo>
+                  <a:lnTo>
+                    <a:pt x="2442792" y="17330"/>
+                  </a:lnTo>
+                  <a:lnTo>
+                    <a:pt x="2366323" y="16793"/>
+                  </a:lnTo>
+                  <a:lnTo>
+                    <a:pt x="2289855" y="16256"/>
+                  </a:lnTo>
+                  <a:lnTo>
+                    <a:pt x="2213386" y="15718"/>
+                  </a:lnTo>
+                  <a:lnTo>
+                    <a:pt x="2136918" y="15180"/>
+                  </a:lnTo>
+                  <a:lnTo>
+                    <a:pt x="2060450" y="14642"/>
+                  </a:lnTo>
+                  <a:lnTo>
+                    <a:pt x="1983981" y="14103"/>
+                  </a:lnTo>
+                  <a:lnTo>
+                    <a:pt x="1907513" y="13564"/>
+                  </a:lnTo>
+                  <a:lnTo>
+                    <a:pt x="1831044" y="13025"/>
+                  </a:lnTo>
+                  <a:lnTo>
+                    <a:pt x="1754576" y="12485"/>
+                  </a:lnTo>
+                  <a:lnTo>
+                    <a:pt x="1678107" y="11945"/>
+                  </a:lnTo>
+                  <a:lnTo>
+                    <a:pt x="1601639" y="11405"/>
+                  </a:lnTo>
+                  <a:lnTo>
+                    <a:pt x="1525171" y="10864"/>
+                  </a:lnTo>
+                  <a:lnTo>
+                    <a:pt x="1448702" y="10323"/>
+                  </a:lnTo>
+                  <a:lnTo>
+                    <a:pt x="1372234" y="9781"/>
+                  </a:lnTo>
+                  <a:lnTo>
+                    <a:pt x="1295765" y="9239"/>
+                  </a:lnTo>
+                  <a:lnTo>
+                    <a:pt x="1219297" y="8697"/>
+                  </a:lnTo>
+                  <a:lnTo>
+                    <a:pt x="1142828" y="8154"/>
+                  </a:lnTo>
+                  <a:lnTo>
+                    <a:pt x="1066360" y="7611"/>
+                  </a:lnTo>
+                  <a:lnTo>
+                    <a:pt x="989892" y="7068"/>
+                  </a:lnTo>
+                  <a:lnTo>
+                    <a:pt x="913423" y="6524"/>
+                  </a:lnTo>
+                  <a:lnTo>
+                    <a:pt x="836955" y="5980"/>
+                  </a:lnTo>
+                  <a:lnTo>
+                    <a:pt x="760486" y="5435"/>
+                  </a:lnTo>
+                  <a:lnTo>
+                    <a:pt x="684018" y="4890"/>
+                  </a:lnTo>
+                  <a:lnTo>
+                    <a:pt x="607549" y="4345"/>
+                  </a:lnTo>
+                  <a:lnTo>
+                    <a:pt x="531081" y="3799"/>
+                  </a:lnTo>
+                  <a:lnTo>
+                    <a:pt x="454613" y="3253"/>
+                  </a:lnTo>
+                  <a:lnTo>
+                    <a:pt x="378144" y="2707"/>
+                  </a:lnTo>
+                  <a:lnTo>
+                    <a:pt x="301676" y="2160"/>
+                  </a:lnTo>
+                  <a:lnTo>
+                    <a:pt x="225207" y="1613"/>
+                  </a:lnTo>
+                  <a:lnTo>
+                    <a:pt x="148739" y="1066"/>
+                  </a:lnTo>
+                  <a:lnTo>
+                    <a:pt x="72270" y="518"/>
                   </a:lnTo>
                   <a:lnTo>
                     <a:pt x="0" y="0"/>
@@ -4169,306 +4556,306 @@
         </p:sp>
         <p:sp>
           <p:nvSpPr>
-            <p:cNvPr id="24" name="pl24"/>
+            <p:cNvPr id="33" name="pl33"/>
             <p:cNvSpPr/>
             <p:nvPr/>
           </p:nvSpPr>
           <p:spPr>
             <a:xfrm>
-              <a:off x="915645" y="3404716"/>
-              <a:ext cx="7260303" cy="1771546"/>
+              <a:off x="915645" y="3403584"/>
+              <a:ext cx="7260303" cy="1804961"/>
             </a:xfrm>
             <a:custGeom>
               <a:avLst/>
               <a:pathLst>
-                <a:path w="7260303" h="1771546">
+                <a:path w="7260303" h="1804961">
                   <a:moveTo>
                     <a:pt x="0" y="0"/>
                   </a:moveTo>
                   <a:lnTo>
-                    <a:pt x="72270" y="41928"/>
-                  </a:lnTo>
-                  <a:lnTo>
-                    <a:pt x="148739" y="85317"/>
-                  </a:lnTo>
-                  <a:lnTo>
-                    <a:pt x="225207" y="127752"/>
-                  </a:lnTo>
-                  <a:lnTo>
-                    <a:pt x="301676" y="169254"/>
-                  </a:lnTo>
-                  <a:lnTo>
-                    <a:pt x="378144" y="209844"/>
-                  </a:lnTo>
-                  <a:lnTo>
-                    <a:pt x="454613" y="249542"/>
-                  </a:lnTo>
-                  <a:lnTo>
-                    <a:pt x="531081" y="288367"/>
-                  </a:lnTo>
-                  <a:lnTo>
-                    <a:pt x="607549" y="326339"/>
-                  </a:lnTo>
-                  <a:lnTo>
-                    <a:pt x="684018" y="363476"/>
-                  </a:lnTo>
-                  <a:lnTo>
-                    <a:pt x="760486" y="399797"/>
-                  </a:lnTo>
-                  <a:lnTo>
-                    <a:pt x="836955" y="435320"/>
-                  </a:lnTo>
-                  <a:lnTo>
-                    <a:pt x="913423" y="470061"/>
-                  </a:lnTo>
-                  <a:lnTo>
-                    <a:pt x="989892" y="504040"/>
-                  </a:lnTo>
-                  <a:lnTo>
-                    <a:pt x="1066360" y="537271"/>
-                  </a:lnTo>
-                  <a:lnTo>
-                    <a:pt x="1142828" y="569772"/>
-                  </a:lnTo>
-                  <a:lnTo>
-                    <a:pt x="1219297" y="601558"/>
-                  </a:lnTo>
-                  <a:lnTo>
-                    <a:pt x="1295765" y="632646"/>
-                  </a:lnTo>
-                  <a:lnTo>
-                    <a:pt x="1372234" y="663050"/>
-                  </a:lnTo>
-                  <a:lnTo>
-                    <a:pt x="1448702" y="692786"/>
-                  </a:lnTo>
-                  <a:lnTo>
-                    <a:pt x="1525171" y="721869"/>
-                  </a:lnTo>
-                  <a:lnTo>
-                    <a:pt x="1601639" y="750312"/>
-                  </a:lnTo>
-                  <a:lnTo>
-                    <a:pt x="1678107" y="778130"/>
-                  </a:lnTo>
-                  <a:lnTo>
-                    <a:pt x="1754576" y="805337"/>
-                  </a:lnTo>
-                  <a:lnTo>
-                    <a:pt x="1831044" y="831945"/>
-                  </a:lnTo>
-                  <a:lnTo>
-                    <a:pt x="1907513" y="857969"/>
-                  </a:lnTo>
-                  <a:lnTo>
-                    <a:pt x="1983981" y="883421"/>
-                  </a:lnTo>
-                  <a:lnTo>
-                    <a:pt x="2060450" y="908313"/>
-                  </a:lnTo>
-                  <a:lnTo>
-                    <a:pt x="2136918" y="932658"/>
-                  </a:lnTo>
-                  <a:lnTo>
-                    <a:pt x="2213386" y="956468"/>
-                  </a:lnTo>
-                  <a:lnTo>
-                    <a:pt x="2289855" y="979755"/>
-                  </a:lnTo>
-                  <a:lnTo>
-                    <a:pt x="2366323" y="1002530"/>
-                  </a:lnTo>
-                  <a:lnTo>
-                    <a:pt x="2442792" y="1024804"/>
-                  </a:lnTo>
-                  <a:lnTo>
-                    <a:pt x="2519260" y="1046589"/>
-                  </a:lnTo>
-                  <a:lnTo>
-                    <a:pt x="2595729" y="1067894"/>
-                  </a:lnTo>
-                  <a:lnTo>
-                    <a:pt x="2672197" y="1088732"/>
-                  </a:lnTo>
-                  <a:lnTo>
-                    <a:pt x="2748666" y="1109111"/>
-                  </a:lnTo>
-                  <a:lnTo>
-                    <a:pt x="2825134" y="1129043"/>
-                  </a:lnTo>
-                  <a:lnTo>
-                    <a:pt x="2901602" y="1148536"/>
-                  </a:lnTo>
-                  <a:lnTo>
-                    <a:pt x="2978071" y="1167601"/>
-                  </a:lnTo>
-                  <a:lnTo>
-                    <a:pt x="3054539" y="1186247"/>
-                  </a:lnTo>
-                  <a:lnTo>
-                    <a:pt x="3131008" y="1204483"/>
-                  </a:lnTo>
-                  <a:lnTo>
-                    <a:pt x="3207476" y="1222318"/>
-                  </a:lnTo>
-                  <a:lnTo>
-                    <a:pt x="3283945" y="1239761"/>
-                  </a:lnTo>
-                  <a:lnTo>
-                    <a:pt x="3360413" y="1256821"/>
-                  </a:lnTo>
-                  <a:lnTo>
-                    <a:pt x="3436881" y="1273506"/>
-                  </a:lnTo>
-                  <a:lnTo>
-                    <a:pt x="3513350" y="1289824"/>
-                  </a:lnTo>
-                  <a:lnTo>
-                    <a:pt x="3589818" y="1305783"/>
-                  </a:lnTo>
-                  <a:lnTo>
-                    <a:pt x="3666287" y="1321392"/>
-                  </a:lnTo>
-                  <a:lnTo>
-                    <a:pt x="3742755" y="1336657"/>
-                  </a:lnTo>
-                  <a:lnTo>
-                    <a:pt x="3819224" y="1351587"/>
-                  </a:lnTo>
-                  <a:lnTo>
-                    <a:pt x="3895692" y="1366189"/>
-                  </a:lnTo>
-                  <a:lnTo>
-                    <a:pt x="3972160" y="1380470"/>
-                  </a:lnTo>
-                  <a:lnTo>
-                    <a:pt x="4048629" y="1394436"/>
-                  </a:lnTo>
-                  <a:lnTo>
-                    <a:pt x="4125097" y="1408096"/>
-                  </a:lnTo>
-                  <a:lnTo>
-                    <a:pt x="4201566" y="1421456"/>
-                  </a:lnTo>
-                  <a:lnTo>
-                    <a:pt x="4278034" y="1434522"/>
-                  </a:lnTo>
-                  <a:lnTo>
-                    <a:pt x="4354503" y="1447301"/>
-                  </a:lnTo>
-                  <a:lnTo>
-                    <a:pt x="4430971" y="1459799"/>
-                  </a:lnTo>
-                  <a:lnTo>
-                    <a:pt x="4507439" y="1472022"/>
-                  </a:lnTo>
-                  <a:lnTo>
-                    <a:pt x="4583908" y="1483976"/>
-                  </a:lnTo>
-                  <a:lnTo>
-                    <a:pt x="4660376" y="1495668"/>
-                  </a:lnTo>
-                  <a:lnTo>
-                    <a:pt x="4736845" y="1507103"/>
-                  </a:lnTo>
-                  <a:lnTo>
-                    <a:pt x="4813313" y="1518286"/>
-                  </a:lnTo>
-                  <a:lnTo>
-                    <a:pt x="4889782" y="1529224"/>
-                  </a:lnTo>
-                  <a:lnTo>
-                    <a:pt x="4966250" y="1539921"/>
-                  </a:lnTo>
-                  <a:lnTo>
-                    <a:pt x="5042719" y="1550383"/>
-                  </a:lnTo>
-                  <a:lnTo>
-                    <a:pt x="5119187" y="1560615"/>
-                  </a:lnTo>
-                  <a:lnTo>
-                    <a:pt x="5195655" y="1570623"/>
-                  </a:lnTo>
-                  <a:lnTo>
-                    <a:pt x="5272124" y="1580410"/>
-                  </a:lnTo>
-                  <a:lnTo>
-                    <a:pt x="5348592" y="1589982"/>
-                  </a:lnTo>
-                  <a:lnTo>
-                    <a:pt x="5425061" y="1599344"/>
-                  </a:lnTo>
-                  <a:lnTo>
-                    <a:pt x="5501529" y="1608500"/>
-                  </a:lnTo>
-                  <a:lnTo>
-                    <a:pt x="5577998" y="1617454"/>
-                  </a:lnTo>
-                  <a:lnTo>
-                    <a:pt x="5654466" y="1626212"/>
-                  </a:lnTo>
-                  <a:lnTo>
-                    <a:pt x="5730934" y="1634777"/>
-                  </a:lnTo>
-                  <a:lnTo>
-                    <a:pt x="5807403" y="1643155"/>
-                  </a:lnTo>
-                  <a:lnTo>
-                    <a:pt x="5883871" y="1651348"/>
-                  </a:lnTo>
-                  <a:lnTo>
-                    <a:pt x="5960340" y="1659360"/>
-                  </a:lnTo>
-                  <a:lnTo>
-                    <a:pt x="6036808" y="1667197"/>
-                  </a:lnTo>
-                  <a:lnTo>
-                    <a:pt x="6113277" y="1674862"/>
-                  </a:lnTo>
-                  <a:lnTo>
-                    <a:pt x="6189745" y="1682358"/>
-                  </a:lnTo>
-                  <a:lnTo>
-                    <a:pt x="6266213" y="1689689"/>
-                  </a:lnTo>
-                  <a:lnTo>
-                    <a:pt x="6342682" y="1696859"/>
-                  </a:lnTo>
-                  <a:lnTo>
-                    <a:pt x="6419150" y="1703871"/>
-                  </a:lnTo>
-                  <a:lnTo>
-                    <a:pt x="6495619" y="1710730"/>
-                  </a:lnTo>
-                  <a:lnTo>
-                    <a:pt x="6572087" y="1717437"/>
-                  </a:lnTo>
-                  <a:lnTo>
-                    <a:pt x="6648556" y="1723998"/>
-                  </a:lnTo>
-                  <a:lnTo>
-                    <a:pt x="6725024" y="1730414"/>
-                  </a:lnTo>
-                  <a:lnTo>
-                    <a:pt x="6801492" y="1736689"/>
-                  </a:lnTo>
-                  <a:lnTo>
-                    <a:pt x="6877961" y="1742826"/>
-                  </a:lnTo>
-                  <a:lnTo>
-                    <a:pt x="6954429" y="1748828"/>
-                  </a:lnTo>
-                  <a:lnTo>
-                    <a:pt x="7030898" y="1754698"/>
-                  </a:lnTo>
-                  <a:lnTo>
-                    <a:pt x="7107366" y="1760439"/>
-                  </a:lnTo>
-                  <a:lnTo>
-                    <a:pt x="7183835" y="1766054"/>
-                  </a:lnTo>
-                  <a:lnTo>
-                    <a:pt x="7260303" y="1771546"/>
+                    <a:pt x="72270" y="42719"/>
+                  </a:lnTo>
+                  <a:lnTo>
+                    <a:pt x="148739" y="86926"/>
+                  </a:lnTo>
+                  <a:lnTo>
+                    <a:pt x="225207" y="130161"/>
+                  </a:lnTo>
+                  <a:lnTo>
+                    <a:pt x="301676" y="172447"/>
+                  </a:lnTo>
+                  <a:lnTo>
+                    <a:pt x="378144" y="213802"/>
+                  </a:lnTo>
+                  <a:lnTo>
+                    <a:pt x="454613" y="254249"/>
+                  </a:lnTo>
+                  <a:lnTo>
+                    <a:pt x="531081" y="293806"/>
+                  </a:lnTo>
+                  <a:lnTo>
+                    <a:pt x="607549" y="332494"/>
+                  </a:lnTo>
+                  <a:lnTo>
+                    <a:pt x="684018" y="370332"/>
+                  </a:lnTo>
+                  <a:lnTo>
+                    <a:pt x="760486" y="407338"/>
+                  </a:lnTo>
+                  <a:lnTo>
+                    <a:pt x="836955" y="443531"/>
+                  </a:lnTo>
+                  <a:lnTo>
+                    <a:pt x="913423" y="478928"/>
+                  </a:lnTo>
+                  <a:lnTo>
+                    <a:pt x="989892" y="513547"/>
+                  </a:lnTo>
+                  <a:lnTo>
+                    <a:pt x="1066360" y="547405"/>
+                  </a:lnTo>
+                  <a:lnTo>
+                    <a:pt x="1142828" y="580519"/>
+                  </a:lnTo>
+                  <a:lnTo>
+                    <a:pt x="1219297" y="612905"/>
+                  </a:lnTo>
+                  <a:lnTo>
+                    <a:pt x="1295765" y="644579"/>
+                  </a:lnTo>
+                  <a:lnTo>
+                    <a:pt x="1372234" y="675557"/>
+                  </a:lnTo>
+                  <a:lnTo>
+                    <a:pt x="1448702" y="705854"/>
+                  </a:lnTo>
+                  <a:lnTo>
+                    <a:pt x="1525171" y="735485"/>
+                  </a:lnTo>
+                  <a:lnTo>
+                    <a:pt x="1601639" y="764465"/>
+                  </a:lnTo>
+                  <a:lnTo>
+                    <a:pt x="1678107" y="792808"/>
+                  </a:lnTo>
+                  <a:lnTo>
+                    <a:pt x="1754576" y="820527"/>
+                  </a:lnTo>
+                  <a:lnTo>
+                    <a:pt x="1831044" y="847638"/>
+                  </a:lnTo>
+                  <a:lnTo>
+                    <a:pt x="1907513" y="874152"/>
+                  </a:lnTo>
+                  <a:lnTo>
+                    <a:pt x="1983981" y="900084"/>
+                  </a:lnTo>
+                  <a:lnTo>
+                    <a:pt x="2060450" y="925446"/>
+                  </a:lnTo>
+                  <a:lnTo>
+                    <a:pt x="2136918" y="950250"/>
+                  </a:lnTo>
+                  <a:lnTo>
+                    <a:pt x="2213386" y="974509"/>
+                  </a:lnTo>
+                  <a:lnTo>
+                    <a:pt x="2289855" y="998235"/>
+                  </a:lnTo>
+                  <a:lnTo>
+                    <a:pt x="2366323" y="1021440"/>
+                  </a:lnTo>
+                  <a:lnTo>
+                    <a:pt x="2442792" y="1044134"/>
+                  </a:lnTo>
+                  <a:lnTo>
+                    <a:pt x="2519260" y="1066330"/>
+                  </a:lnTo>
+                  <a:lnTo>
+                    <a:pt x="2595729" y="1088037"/>
+                  </a:lnTo>
+                  <a:lnTo>
+                    <a:pt x="2672197" y="1109268"/>
+                  </a:lnTo>
+                  <a:lnTo>
+                    <a:pt x="2748666" y="1130032"/>
+                  </a:lnTo>
+                  <a:lnTo>
+                    <a:pt x="2825134" y="1150339"/>
+                  </a:lnTo>
+                  <a:lnTo>
+                    <a:pt x="2901602" y="1170200"/>
+                  </a:lnTo>
+                  <a:lnTo>
+                    <a:pt x="2978071" y="1189625"/>
+                  </a:lnTo>
+                  <a:lnTo>
+                    <a:pt x="3054539" y="1208622"/>
+                  </a:lnTo>
+                  <a:lnTo>
+                    <a:pt x="3131008" y="1227202"/>
+                  </a:lnTo>
+                  <a:lnTo>
+                    <a:pt x="3207476" y="1245374"/>
+                  </a:lnTo>
+                  <a:lnTo>
+                    <a:pt x="3283945" y="1263146"/>
+                  </a:lnTo>
+                  <a:lnTo>
+                    <a:pt x="3360413" y="1280527"/>
+                  </a:lnTo>
+                  <a:lnTo>
+                    <a:pt x="3436881" y="1297527"/>
+                  </a:lnTo>
+                  <a:lnTo>
+                    <a:pt x="3513350" y="1314153"/>
+                  </a:lnTo>
+                  <a:lnTo>
+                    <a:pt x="3589818" y="1330413"/>
+                  </a:lnTo>
+                  <a:lnTo>
+                    <a:pt x="3666287" y="1346316"/>
+                  </a:lnTo>
+                  <a:lnTo>
+                    <a:pt x="3742755" y="1361869"/>
+                  </a:lnTo>
+                  <a:lnTo>
+                    <a:pt x="3819224" y="1377081"/>
+                  </a:lnTo>
+                  <a:lnTo>
+                    <a:pt x="3895692" y="1391958"/>
+                  </a:lnTo>
+                  <a:lnTo>
+                    <a:pt x="3972160" y="1406508"/>
+                  </a:lnTo>
+                  <a:lnTo>
+                    <a:pt x="4048629" y="1420739"/>
+                  </a:lnTo>
+                  <a:lnTo>
+                    <a:pt x="4125097" y="1434656"/>
+                  </a:lnTo>
+                  <a:lnTo>
+                    <a:pt x="4201566" y="1448268"/>
+                  </a:lnTo>
+                  <a:lnTo>
+                    <a:pt x="4278034" y="1461580"/>
+                  </a:lnTo>
+                  <a:lnTo>
+                    <a:pt x="4354503" y="1474600"/>
+                  </a:lnTo>
+                  <a:lnTo>
+                    <a:pt x="4430971" y="1487334"/>
+                  </a:lnTo>
+                  <a:lnTo>
+                    <a:pt x="4507439" y="1499787"/>
+                  </a:lnTo>
+                  <a:lnTo>
+                    <a:pt x="4583908" y="1511968"/>
+                  </a:lnTo>
+                  <a:lnTo>
+                    <a:pt x="4660376" y="1523880"/>
+                  </a:lnTo>
+                  <a:lnTo>
+                    <a:pt x="4736845" y="1535530"/>
+                  </a:lnTo>
+                  <a:lnTo>
+                    <a:pt x="4813313" y="1546925"/>
+                  </a:lnTo>
+                  <a:lnTo>
+                    <a:pt x="4889782" y="1558069"/>
+                  </a:lnTo>
+                  <a:lnTo>
+                    <a:pt x="4966250" y="1568968"/>
+                  </a:lnTo>
+                  <a:lnTo>
+                    <a:pt x="5042719" y="1579627"/>
+                  </a:lnTo>
+                  <a:lnTo>
+                    <a:pt x="5119187" y="1590052"/>
+                  </a:lnTo>
+                  <a:lnTo>
+                    <a:pt x="5195655" y="1600248"/>
+                  </a:lnTo>
+                  <a:lnTo>
+                    <a:pt x="5272124" y="1610220"/>
+                  </a:lnTo>
+                  <a:lnTo>
+                    <a:pt x="5348592" y="1619973"/>
+                  </a:lnTo>
+                  <a:lnTo>
+                    <a:pt x="5425061" y="1629511"/>
+                  </a:lnTo>
+                  <a:lnTo>
+                    <a:pt x="5501529" y="1638839"/>
+                  </a:lnTo>
+                  <a:lnTo>
+                    <a:pt x="5577998" y="1647963"/>
+                  </a:lnTo>
+                  <a:lnTo>
+                    <a:pt x="5654466" y="1656886"/>
+                  </a:lnTo>
+                  <a:lnTo>
+                    <a:pt x="5730934" y="1665613"/>
+                  </a:lnTo>
+                  <a:lnTo>
+                    <a:pt x="5807403" y="1674148"/>
+                  </a:lnTo>
+                  <a:lnTo>
+                    <a:pt x="5883871" y="1682496"/>
+                  </a:lnTo>
+                  <a:lnTo>
+                    <a:pt x="5960340" y="1690660"/>
+                  </a:lnTo>
+                  <a:lnTo>
+                    <a:pt x="6036808" y="1698644"/>
+                  </a:lnTo>
+                  <a:lnTo>
+                    <a:pt x="6113277" y="1706453"/>
+                  </a:lnTo>
+                  <a:lnTo>
+                    <a:pt x="6189745" y="1714091"/>
+                  </a:lnTo>
+                  <a:lnTo>
+                    <a:pt x="6266213" y="1721560"/>
+                  </a:lnTo>
+                  <a:lnTo>
+                    <a:pt x="6342682" y="1728865"/>
+                  </a:lnTo>
+                  <a:lnTo>
+                    <a:pt x="6419150" y="1736010"/>
+                  </a:lnTo>
+                  <a:lnTo>
+                    <a:pt x="6495619" y="1742998"/>
+                  </a:lnTo>
+                  <a:lnTo>
+                    <a:pt x="6572087" y="1749832"/>
+                  </a:lnTo>
+                  <a:lnTo>
+                    <a:pt x="6648556" y="1756516"/>
+                  </a:lnTo>
+                  <a:lnTo>
+                    <a:pt x="6725024" y="1763053"/>
+                  </a:lnTo>
+                  <a:lnTo>
+                    <a:pt x="6801492" y="1769446"/>
+                  </a:lnTo>
+                  <a:lnTo>
+                    <a:pt x="6877961" y="1775699"/>
+                  </a:lnTo>
+                  <a:lnTo>
+                    <a:pt x="6954429" y="1781814"/>
+                  </a:lnTo>
+                  <a:lnTo>
+                    <a:pt x="7030898" y="1787795"/>
+                  </a:lnTo>
+                  <a:lnTo>
+                    <a:pt x="7107366" y="1793645"/>
+                  </a:lnTo>
+                  <a:lnTo>
+                    <a:pt x="7183835" y="1799366"/>
+                  </a:lnTo>
+                  <a:lnTo>
+                    <a:pt x="7260303" y="1804961"/>
                   </a:lnTo>
                 </a:path>
               </a:pathLst>
@@ -4491,13 +4878,13 @@
         </p:sp>
         <p:sp>
           <p:nvSpPr>
-            <p:cNvPr id="25" name="pl25"/>
+            <p:cNvPr id="34" name="pl34"/>
             <p:cNvSpPr/>
             <p:nvPr/>
           </p:nvSpPr>
           <p:spPr>
             <a:xfrm>
-              <a:off x="915645" y="4655980"/>
+              <a:off x="915645" y="4678449"/>
               <a:ext cx="7682587" cy="0"/>
             </a:xfrm>
             <a:custGeom>
@@ -4534,21 +4921,21 @@
         </p:sp>
         <p:sp>
           <p:nvSpPr>
-            <p:cNvPr id="26" name="pl26"/>
+            <p:cNvPr id="35" name="pl35"/>
             <p:cNvSpPr/>
             <p:nvPr/>
           </p:nvSpPr>
           <p:spPr>
             <a:xfrm>
-              <a:off x="4250960" y="2209169"/>
-              <a:ext cx="0" cy="3364365"/>
+              <a:off x="4250960" y="2185486"/>
+              <a:ext cx="0" cy="3427824"/>
             </a:xfrm>
             <a:custGeom>
               <a:avLst/>
               <a:pathLst>
-                <a:path w="0" h="3364365">
+                <a:path w="0" h="3427824">
                   <a:moveTo>
-                    <a:pt x="0" y="3364365"/>
+                    <a:pt x="0" y="3427824"/>
                   </a:moveTo>
                   <a:lnTo>
                     <a:pt x="0" y="0"/>
@@ -4577,13 +4964,13 @@
         </p:sp>
         <p:sp>
           <p:nvSpPr>
-            <p:cNvPr id="27" name="tx27"/>
+            <p:cNvPr id="36" name="tx36"/>
             <p:cNvSpPr/>
             <p:nvPr/>
           </p:nvSpPr>
           <p:spPr>
             <a:xfrm>
-              <a:off x="756929" y="5369631"/>
+              <a:off x="756929" y="5406523"/>
               <a:ext cx="79004" cy="101955"/>
             </a:xfrm>
             <a:prstGeom prst="rect">
@@ -4623,13 +5010,13 @@
         </p:sp>
         <p:sp>
           <p:nvSpPr>
-            <p:cNvPr id="28" name="tx28"/>
+            <p:cNvPr id="37" name="tx37"/>
             <p:cNvSpPr/>
             <p:nvPr/>
           </p:nvSpPr>
           <p:spPr>
             <a:xfrm>
-              <a:off x="756929" y="4605002"/>
+              <a:off x="756929" y="4627472"/>
               <a:ext cx="79004" cy="101955"/>
             </a:xfrm>
             <a:prstGeom prst="rect">
@@ -4669,13 +5056,13 @@
         </p:sp>
         <p:sp>
           <p:nvSpPr>
-            <p:cNvPr id="29" name="tx29"/>
+            <p:cNvPr id="38" name="tx38"/>
             <p:cNvSpPr/>
             <p:nvPr/>
           </p:nvSpPr>
           <p:spPr>
             <a:xfrm>
-              <a:off x="756929" y="3840374"/>
+              <a:off x="756929" y="3848420"/>
               <a:ext cx="79004" cy="101955"/>
             </a:xfrm>
             <a:prstGeom prst="rect">
@@ -4715,13 +5102,13 @@
         </p:sp>
         <p:sp>
           <p:nvSpPr>
-            <p:cNvPr id="30" name="tx30"/>
+            <p:cNvPr id="39" name="tx39"/>
             <p:cNvSpPr/>
             <p:nvPr/>
           </p:nvSpPr>
           <p:spPr>
             <a:xfrm>
-              <a:off x="756929" y="3075745"/>
+              <a:off x="756929" y="3069369"/>
               <a:ext cx="79004" cy="101955"/>
             </a:xfrm>
             <a:prstGeom prst="rect">
@@ -4761,13 +5148,13 @@
         </p:sp>
         <p:sp>
           <p:nvSpPr>
-            <p:cNvPr id="31" name="tx31"/>
+            <p:cNvPr id="40" name="tx40"/>
             <p:cNvSpPr/>
             <p:nvPr/>
           </p:nvSpPr>
           <p:spPr>
             <a:xfrm>
-              <a:off x="756929" y="2311117"/>
+              <a:off x="756929" y="2290318"/>
               <a:ext cx="79004" cy="101955"/>
             </a:xfrm>
             <a:prstGeom prst="rect">
@@ -4807,14 +5194,14 @@
         </p:sp>
         <p:sp>
           <p:nvSpPr>
-            <p:cNvPr id="32" name="tx32"/>
+            <p:cNvPr id="41" name="tx41"/>
             <p:cNvSpPr/>
             <p:nvPr/>
           </p:nvSpPr>
           <p:spPr>
             <a:xfrm>
-              <a:off x="2451993" y="5653245"/>
-              <a:ext cx="244784" cy="101955"/>
+              <a:off x="1598722" y="5693022"/>
+              <a:ext cx="205282" cy="101955"/>
             </a:xfrm>
             <a:prstGeom prst="rect">
               <a:avLst/>
@@ -4846,21 +5233,21 @@
                   <a:latin typeface="Helvetica"/>
                   <a:cs typeface="Helvetica"/>
                 </a:rPr>
-                <a:t>-0.2</a:t>
+                <a:t>-30</a:t>
               </a:r>
             </a:p>
           </p:txBody>
         </p:sp>
         <p:sp>
           <p:nvSpPr>
-            <p:cNvPr id="33" name="tx33"/>
+            <p:cNvPr id="42" name="tx42"/>
             <p:cNvSpPr/>
             <p:nvPr/>
           </p:nvSpPr>
           <p:spPr>
             <a:xfrm>
-              <a:off x="4221672" y="5653245"/>
-              <a:ext cx="197510" cy="101955"/>
+              <a:off x="2471744" y="5693022"/>
+              <a:ext cx="205282" cy="101955"/>
             </a:xfrm>
             <a:prstGeom prst="rect">
               <a:avLst/>
@@ -4892,21 +5279,21 @@
                   <a:latin typeface="Helvetica"/>
                   <a:cs typeface="Helvetica"/>
                 </a:rPr>
-                <a:t>0.0</a:t>
+                <a:t>-20</a:t>
               </a:r>
             </a:p>
           </p:txBody>
         </p:sp>
         <p:sp>
           <p:nvSpPr>
-            <p:cNvPr id="34" name="tx34"/>
+            <p:cNvPr id="43" name="tx43"/>
             <p:cNvSpPr/>
             <p:nvPr/>
           </p:nvSpPr>
           <p:spPr>
             <a:xfrm>
-              <a:off x="5967715" y="5653245"/>
-              <a:ext cx="197510" cy="101955"/>
+              <a:off x="3344765" y="5693022"/>
+              <a:ext cx="205282" cy="101955"/>
             </a:xfrm>
             <a:prstGeom prst="rect">
               <a:avLst/>
@@ -4938,21 +5325,21 @@
                   <a:latin typeface="Helvetica"/>
                   <a:cs typeface="Helvetica"/>
                 </a:rPr>
-                <a:t>0.2</a:t>
+                <a:t>-10</a:t>
               </a:r>
             </a:p>
           </p:txBody>
         </p:sp>
         <p:sp>
           <p:nvSpPr>
-            <p:cNvPr id="35" name="tx35"/>
+            <p:cNvPr id="44" name="tx44"/>
             <p:cNvSpPr/>
             <p:nvPr/>
           </p:nvSpPr>
           <p:spPr>
             <a:xfrm>
-              <a:off x="7713757" y="5653245"/>
-              <a:ext cx="197510" cy="101955"/>
+              <a:off x="4280925" y="5693022"/>
+              <a:ext cx="79004" cy="101955"/>
             </a:xfrm>
             <a:prstGeom prst="rect">
               <a:avLst/>
@@ -4984,21 +5371,205 @@
                   <a:latin typeface="Helvetica"/>
                   <a:cs typeface="Helvetica"/>
                 </a:rPr>
-                <a:t>0.4</a:t>
+                <a:t>0</a:t>
               </a:r>
             </a:p>
           </p:txBody>
         </p:sp>
         <p:sp>
           <p:nvSpPr>
-            <p:cNvPr id="36" name="tx36"/>
+            <p:cNvPr id="45" name="tx45"/>
             <p:cNvSpPr/>
             <p:nvPr/>
           </p:nvSpPr>
           <p:spPr>
             <a:xfrm>
-              <a:off x="2688337" y="5834415"/>
-              <a:ext cx="2138873" cy="127558"/>
+              <a:off x="5114445" y="5693022"/>
+              <a:ext cx="158008" cy="101955"/>
+            </a:xfrm>
+            <a:prstGeom prst="rect">
+              <a:avLst/>
+            </a:prstGeom>
+            <a:noFill/>
+          </p:spPr>
+          <p:txBody>
+            <a:bodyPr lIns="0" rIns="0" tIns="0" bIns="0" anchorCtr="1" anchor="ctr" wrap="none"/>
+            <a:lstStyle/>
+            <a:p>
+              <a:pPr algn="l" marL="0" marR="0" indent="0">
+                <a:lnSpc>
+                  <a:spcPts val="1120"/>
+                </a:lnSpc>
+                <a:spcBef>
+                  <a:spcPts val="0"/>
+                </a:spcBef>
+                <a:spcAft>
+                  <a:spcPts val="0"/>
+                </a:spcAft>
+              </a:pPr>
+              <a:r>
+                <a:rPr sz="1120">
+                  <a:solidFill>
+                    <a:srgbClr val="4D4D4D">
+                      <a:alpha val="100000"/>
+                    </a:srgbClr>
+                  </a:solidFill>
+                  <a:latin typeface="Helvetica"/>
+                  <a:cs typeface="Helvetica"/>
+                </a:rPr>
+                <a:t>10</a:t>
+              </a:r>
+            </a:p>
+          </p:txBody>
+        </p:sp>
+        <p:sp>
+          <p:nvSpPr>
+            <p:cNvPr id="46" name="tx46"/>
+            <p:cNvSpPr/>
+            <p:nvPr/>
+          </p:nvSpPr>
+          <p:spPr>
+            <a:xfrm>
+              <a:off x="5987466" y="5693022"/>
+              <a:ext cx="158008" cy="101955"/>
+            </a:xfrm>
+            <a:prstGeom prst="rect">
+              <a:avLst/>
+            </a:prstGeom>
+            <a:noFill/>
+          </p:spPr>
+          <p:txBody>
+            <a:bodyPr lIns="0" rIns="0" tIns="0" bIns="0" anchorCtr="1" anchor="ctr" wrap="none"/>
+            <a:lstStyle/>
+            <a:p>
+              <a:pPr algn="l" marL="0" marR="0" indent="0">
+                <a:lnSpc>
+                  <a:spcPts val="1120"/>
+                </a:lnSpc>
+                <a:spcBef>
+                  <a:spcPts val="0"/>
+                </a:spcBef>
+                <a:spcAft>
+                  <a:spcPts val="0"/>
+                </a:spcAft>
+              </a:pPr>
+              <a:r>
+                <a:rPr sz="1120">
+                  <a:solidFill>
+                    <a:srgbClr val="4D4D4D">
+                      <a:alpha val="100000"/>
+                    </a:srgbClr>
+                  </a:solidFill>
+                  <a:latin typeface="Helvetica"/>
+                  <a:cs typeface="Helvetica"/>
+                </a:rPr>
+                <a:t>20</a:t>
+              </a:r>
+            </a:p>
+          </p:txBody>
+        </p:sp>
+        <p:sp>
+          <p:nvSpPr>
+            <p:cNvPr id="47" name="tx47"/>
+            <p:cNvSpPr/>
+            <p:nvPr/>
+          </p:nvSpPr>
+          <p:spPr>
+            <a:xfrm>
+              <a:off x="6860487" y="5693022"/>
+              <a:ext cx="158008" cy="101955"/>
+            </a:xfrm>
+            <a:prstGeom prst="rect">
+              <a:avLst/>
+            </a:prstGeom>
+            <a:noFill/>
+          </p:spPr>
+          <p:txBody>
+            <a:bodyPr lIns="0" rIns="0" tIns="0" bIns="0" anchorCtr="1" anchor="ctr" wrap="none"/>
+            <a:lstStyle/>
+            <a:p>
+              <a:pPr algn="l" marL="0" marR="0" indent="0">
+                <a:lnSpc>
+                  <a:spcPts val="1120"/>
+                </a:lnSpc>
+                <a:spcBef>
+                  <a:spcPts val="0"/>
+                </a:spcBef>
+                <a:spcAft>
+                  <a:spcPts val="0"/>
+                </a:spcAft>
+              </a:pPr>
+              <a:r>
+                <a:rPr sz="1120">
+                  <a:solidFill>
+                    <a:srgbClr val="4D4D4D">
+                      <a:alpha val="100000"/>
+                    </a:srgbClr>
+                  </a:solidFill>
+                  <a:latin typeface="Helvetica"/>
+                  <a:cs typeface="Helvetica"/>
+                </a:rPr>
+                <a:t>30</a:t>
+              </a:r>
+            </a:p>
+          </p:txBody>
+        </p:sp>
+        <p:sp>
+          <p:nvSpPr>
+            <p:cNvPr id="48" name="tx48"/>
+            <p:cNvSpPr/>
+            <p:nvPr/>
+          </p:nvSpPr>
+          <p:spPr>
+            <a:xfrm>
+              <a:off x="7733508" y="5693022"/>
+              <a:ext cx="158008" cy="101955"/>
+            </a:xfrm>
+            <a:prstGeom prst="rect">
+              <a:avLst/>
+            </a:prstGeom>
+            <a:noFill/>
+          </p:spPr>
+          <p:txBody>
+            <a:bodyPr lIns="0" rIns="0" tIns="0" bIns="0" anchorCtr="1" anchor="ctr" wrap="none"/>
+            <a:lstStyle/>
+            <a:p>
+              <a:pPr algn="l" marL="0" marR="0" indent="0">
+                <a:lnSpc>
+                  <a:spcPts val="1120"/>
+                </a:lnSpc>
+                <a:spcBef>
+                  <a:spcPts val="0"/>
+                </a:spcBef>
+                <a:spcAft>
+                  <a:spcPts val="0"/>
+                </a:spcAft>
+              </a:pPr>
+              <a:r>
+                <a:rPr sz="1120">
+                  <a:solidFill>
+                    <a:srgbClr val="4D4D4D">
+                      <a:alpha val="100000"/>
+                    </a:srgbClr>
+                  </a:solidFill>
+                  <a:latin typeface="Helvetica"/>
+                  <a:cs typeface="Helvetica"/>
+                </a:rPr>
+                <a:t>40</a:t>
+              </a:r>
+            </a:p>
+          </p:txBody>
+        </p:sp>
+        <p:sp>
+          <p:nvSpPr>
+            <p:cNvPr id="49" name="tx49"/>
+            <p:cNvSpPr/>
+            <p:nvPr/>
+          </p:nvSpPr>
+          <p:spPr>
+            <a:xfrm>
+              <a:off x="3941888" y="5870717"/>
+              <a:ext cx="1630100" cy="127558"/>
             </a:xfrm>
             <a:prstGeom prst="rect">
               <a:avLst/>
@@ -5030,572 +5601,20 @@
                   <a:latin typeface="Helvetica"/>
                   <a:cs typeface="Helvetica"/>
                 </a:rPr>
-                <a:t>eGFR difference  =  (eGFR</a:t>
+                <a:t>eGFR difference (%)</a:t>
               </a:r>
             </a:p>
           </p:txBody>
         </p:sp>
         <p:sp>
           <p:nvSpPr>
-            <p:cNvPr id="37" name="tx37"/>
-            <p:cNvSpPr/>
-            <p:nvPr/>
-          </p:nvSpPr>
-          <p:spPr>
-            <a:xfrm>
-              <a:off x="4827210" y="5905308"/>
-              <a:ext cx="89885" cy="89245"/>
-            </a:xfrm>
-            <a:prstGeom prst="rect">
-              <a:avLst/>
-            </a:prstGeom>
-            <a:noFill/>
-          </p:spPr>
-          <p:txBody>
-            <a:bodyPr lIns="0" rIns="0" tIns="0" bIns="0" anchorCtr="1" anchor="ctr" wrap="none"/>
-            <a:lstStyle/>
-            <a:p>
-              <a:pPr algn="l" marL="0" marR="0" indent="0">
-                <a:lnSpc>
-                  <a:spcPts val="979"/>
-                </a:lnSpc>
-                <a:spcBef>
-                  <a:spcPts val="0"/>
-                </a:spcBef>
-                <a:spcAft>
-                  <a:spcPts val="0"/>
-                </a:spcAft>
-              </a:pPr>
-              <a:r>
-                <a:rPr sz="979">
-                  <a:solidFill>
-                    <a:srgbClr val="000000">
-                      <a:alpha val="100000"/>
-                    </a:srgbClr>
-                  </a:solidFill>
-                  <a:latin typeface="Helvetica"/>
-                  <a:cs typeface="Helvetica"/>
-                </a:rPr>
-                <a:t>C</a:t>
-              </a:r>
-            </a:p>
-          </p:txBody>
-        </p:sp>
-        <p:sp>
-          <p:nvSpPr>
-            <p:cNvPr id="38" name="tx38"/>
-            <p:cNvSpPr/>
-            <p:nvPr/>
-          </p:nvSpPr>
-          <p:spPr>
-            <a:xfrm>
-              <a:off x="4917095" y="5905308"/>
-              <a:ext cx="89885" cy="89245"/>
-            </a:xfrm>
-            <a:prstGeom prst="rect">
-              <a:avLst/>
-            </a:prstGeom>
-            <a:noFill/>
-          </p:spPr>
-          <p:txBody>
-            <a:bodyPr lIns="0" rIns="0" tIns="0" bIns="0" anchorCtr="1" anchor="ctr" wrap="none"/>
-            <a:lstStyle/>
-            <a:p>
-              <a:pPr algn="l" marL="0" marR="0" indent="0">
-                <a:lnSpc>
-                  <a:spcPts val="979"/>
-                </a:lnSpc>
-                <a:spcBef>
-                  <a:spcPts val="0"/>
-                </a:spcBef>
-                <a:spcAft>
-                  <a:spcPts val="0"/>
-                </a:spcAft>
-              </a:pPr>
-              <a:r>
-                <a:rPr sz="979">
-                  <a:solidFill>
-                    <a:srgbClr val="000000">
-                      <a:alpha val="100000"/>
-                    </a:srgbClr>
-                  </a:solidFill>
-                  <a:latin typeface="Helvetica"/>
-                  <a:cs typeface="Helvetica"/>
-                </a:rPr>
-                <a:t>R</a:t>
-              </a:r>
-            </a:p>
-          </p:txBody>
-        </p:sp>
-        <p:sp>
-          <p:nvSpPr>
-            <p:cNvPr id="39" name="tx39"/>
-            <p:cNvSpPr/>
-            <p:nvPr/>
-          </p:nvSpPr>
-          <p:spPr>
-            <a:xfrm>
-              <a:off x="5006981" y="5884826"/>
-              <a:ext cx="68305" cy="109728"/>
-            </a:xfrm>
-            <a:prstGeom prst="rect">
-              <a:avLst/>
-            </a:prstGeom>
-            <a:noFill/>
-          </p:spPr>
-          <p:txBody>
-            <a:bodyPr lIns="0" rIns="0" tIns="0" bIns="0" anchorCtr="1" anchor="ctr" wrap="none"/>
-            <a:lstStyle/>
-            <a:p>
-              <a:pPr algn="l" marL="0" marR="0" indent="0">
-                <a:lnSpc>
-                  <a:spcPts val="979"/>
-                </a:lnSpc>
-                <a:spcBef>
-                  <a:spcPts val="0"/>
-                </a:spcBef>
-                <a:spcAft>
-                  <a:spcPts val="0"/>
-                </a:spcAft>
-              </a:pPr>
-              <a:r>
-                <a:rPr sz="979">
-                  <a:solidFill>
-                    <a:srgbClr val="000000">
-                      <a:alpha val="100000"/>
-                    </a:srgbClr>
-                  </a:solidFill>
-                  <a:latin typeface="Symbol"/>
-                  <a:cs typeface="Symbol"/>
-                </a:rPr>
-                <a:t>−</a:t>
-              </a:r>
-            </a:p>
-          </p:txBody>
-        </p:sp>
-        <p:sp>
-          <p:nvSpPr>
-            <p:cNvPr id="40" name="tx40"/>
-            <p:cNvSpPr/>
-            <p:nvPr/>
-          </p:nvSpPr>
-          <p:spPr>
-            <a:xfrm>
-              <a:off x="5075286" y="5905308"/>
-              <a:ext cx="89885" cy="89245"/>
-            </a:xfrm>
-            <a:prstGeom prst="rect">
-              <a:avLst/>
-            </a:prstGeom>
-            <a:noFill/>
-          </p:spPr>
-          <p:txBody>
-            <a:bodyPr lIns="0" rIns="0" tIns="0" bIns="0" anchorCtr="1" anchor="ctr" wrap="none"/>
-            <a:lstStyle/>
-            <a:p>
-              <a:pPr algn="l" marL="0" marR="0" indent="0">
-                <a:lnSpc>
-                  <a:spcPts val="979"/>
-                </a:lnSpc>
-                <a:spcBef>
-                  <a:spcPts val="0"/>
-                </a:spcBef>
-                <a:spcAft>
-                  <a:spcPts val="0"/>
-                </a:spcAft>
-              </a:pPr>
-              <a:r>
-                <a:rPr sz="979">
-                  <a:solidFill>
-                    <a:srgbClr val="000000">
-                      <a:alpha val="100000"/>
-                    </a:srgbClr>
-                  </a:solidFill>
-                  <a:latin typeface="Helvetica"/>
-                  <a:cs typeface="Helvetica"/>
-                </a:rPr>
-                <a:t>C</a:t>
-              </a:r>
-            </a:p>
-          </p:txBody>
-        </p:sp>
-        <p:sp>
-          <p:nvSpPr>
-            <p:cNvPr id="41" name="tx41"/>
-            <p:cNvSpPr/>
-            <p:nvPr/>
-          </p:nvSpPr>
-          <p:spPr>
-            <a:xfrm>
-              <a:off x="5165172" y="5905308"/>
-              <a:ext cx="83027" cy="89245"/>
-            </a:xfrm>
-            <a:prstGeom prst="rect">
-              <a:avLst/>
-            </a:prstGeom>
-            <a:noFill/>
-          </p:spPr>
-          <p:txBody>
-            <a:bodyPr lIns="0" rIns="0" tIns="0" bIns="0" anchorCtr="1" anchor="ctr" wrap="none"/>
-            <a:lstStyle/>
-            <a:p>
-              <a:pPr algn="l" marL="0" marR="0" indent="0">
-                <a:lnSpc>
-                  <a:spcPts val="979"/>
-                </a:lnSpc>
-                <a:spcBef>
-                  <a:spcPts val="0"/>
-                </a:spcBef>
-                <a:spcAft>
-                  <a:spcPts val="0"/>
-                </a:spcAft>
-              </a:pPr>
-              <a:r>
-                <a:rPr sz="979">
-                  <a:solidFill>
-                    <a:srgbClr val="000000">
-                      <a:alpha val="100000"/>
-                    </a:srgbClr>
-                  </a:solidFill>
-                  <a:latin typeface="Helvetica"/>
-                  <a:cs typeface="Helvetica"/>
-                </a:rPr>
-                <a:t>Y</a:t>
-              </a:r>
-            </a:p>
-          </p:txBody>
-        </p:sp>
-        <p:sp>
-          <p:nvSpPr>
-            <p:cNvPr id="42" name="tx42"/>
-            <p:cNvSpPr/>
-            <p:nvPr/>
-          </p:nvSpPr>
-          <p:spPr>
-            <a:xfrm>
-              <a:off x="5248199" y="5905308"/>
-              <a:ext cx="83027" cy="89245"/>
-            </a:xfrm>
-            <a:prstGeom prst="rect">
-              <a:avLst/>
-            </a:prstGeom>
-            <a:noFill/>
-          </p:spPr>
-          <p:txBody>
-            <a:bodyPr lIns="0" rIns="0" tIns="0" bIns="0" anchorCtr="1" anchor="ctr" wrap="none"/>
-            <a:lstStyle/>
-            <a:p>
-              <a:pPr algn="l" marL="0" marR="0" indent="0">
-                <a:lnSpc>
-                  <a:spcPts val="979"/>
-                </a:lnSpc>
-                <a:spcBef>
-                  <a:spcPts val="0"/>
-                </a:spcBef>
-                <a:spcAft>
-                  <a:spcPts val="0"/>
-                </a:spcAft>
-              </a:pPr>
-              <a:r>
-                <a:rPr sz="979">
-                  <a:solidFill>
-                    <a:srgbClr val="000000">
-                      <a:alpha val="100000"/>
-                    </a:srgbClr>
-                  </a:solidFill>
-                  <a:latin typeface="Helvetica"/>
-                  <a:cs typeface="Helvetica"/>
-                </a:rPr>
-                <a:t>S</a:t>
-              </a:r>
-            </a:p>
-          </p:txBody>
-        </p:sp>
-        <p:sp>
-          <p:nvSpPr>
-            <p:cNvPr id="43" name="tx43"/>
-            <p:cNvSpPr/>
-            <p:nvPr/>
-          </p:nvSpPr>
-          <p:spPr>
-            <a:xfrm>
-              <a:off x="5331227" y="5834415"/>
-              <a:ext cx="558149" cy="127558"/>
-            </a:xfrm>
-            <a:prstGeom prst="rect">
-              <a:avLst/>
-            </a:prstGeom>
-            <a:noFill/>
-          </p:spPr>
-          <p:txBody>
-            <a:bodyPr lIns="0" rIns="0" tIns="0" bIns="0" anchorCtr="1" anchor="ctr" wrap="none"/>
-            <a:lstStyle/>
-            <a:p>
-              <a:pPr algn="l" marL="0" marR="0" indent="0">
-                <a:lnSpc>
-                  <a:spcPts val="1400"/>
-                </a:lnSpc>
-                <a:spcBef>
-                  <a:spcPts val="0"/>
-                </a:spcBef>
-                <a:spcAft>
-                  <a:spcPts val="0"/>
-                </a:spcAft>
-              </a:pPr>
-              <a:r>
-                <a:rPr sz="1400">
-                  <a:solidFill>
-                    <a:srgbClr val="000000">
-                      <a:alpha val="100000"/>
-                    </a:srgbClr>
-                  </a:solidFill>
-                  <a:latin typeface="Helvetica"/>
-                  <a:cs typeface="Helvetica"/>
-                </a:rPr>
-                <a:t> − CrCl</a:t>
-              </a:r>
-            </a:p>
-          </p:txBody>
-        </p:sp>
-        <p:sp>
-          <p:nvSpPr>
-            <p:cNvPr id="44" name="tx44"/>
-            <p:cNvSpPr/>
-            <p:nvPr/>
-          </p:nvSpPr>
-          <p:spPr>
-            <a:xfrm>
-              <a:off x="5889377" y="5905308"/>
-              <a:ext cx="89885" cy="89245"/>
-            </a:xfrm>
-            <a:prstGeom prst="rect">
-              <a:avLst/>
-            </a:prstGeom>
-            <a:noFill/>
-          </p:spPr>
-          <p:txBody>
-            <a:bodyPr lIns="0" rIns="0" tIns="0" bIns="0" anchorCtr="1" anchor="ctr" wrap="none"/>
-            <a:lstStyle/>
-            <a:p>
-              <a:pPr algn="l" marL="0" marR="0" indent="0">
-                <a:lnSpc>
-                  <a:spcPts val="979"/>
-                </a:lnSpc>
-                <a:spcBef>
-                  <a:spcPts val="0"/>
-                </a:spcBef>
-                <a:spcAft>
-                  <a:spcPts val="0"/>
-                </a:spcAft>
-              </a:pPr>
-              <a:r>
-                <a:rPr sz="979">
-                  <a:solidFill>
-                    <a:srgbClr val="000000">
-                      <a:alpha val="100000"/>
-                    </a:srgbClr>
-                  </a:solidFill>
-                  <a:latin typeface="Helvetica"/>
-                  <a:cs typeface="Helvetica"/>
-                </a:rPr>
-                <a:t>C</a:t>
-              </a:r>
-            </a:p>
-          </p:txBody>
-        </p:sp>
-        <p:sp>
-          <p:nvSpPr>
-            <p:cNvPr id="45" name="tx45"/>
-            <p:cNvSpPr/>
-            <p:nvPr/>
-          </p:nvSpPr>
-          <p:spPr>
-            <a:xfrm>
-              <a:off x="5979262" y="5905308"/>
-              <a:ext cx="96743" cy="89245"/>
-            </a:xfrm>
-            <a:prstGeom prst="rect">
-              <a:avLst/>
-            </a:prstGeom>
-            <a:noFill/>
-          </p:spPr>
-          <p:txBody>
-            <a:bodyPr lIns="0" rIns="0" tIns="0" bIns="0" anchorCtr="1" anchor="ctr" wrap="none"/>
-            <a:lstStyle/>
-            <a:p>
-              <a:pPr algn="l" marL="0" marR="0" indent="0">
-                <a:lnSpc>
-                  <a:spcPts val="979"/>
-                </a:lnSpc>
-                <a:spcBef>
-                  <a:spcPts val="0"/>
-                </a:spcBef>
-                <a:spcAft>
-                  <a:spcPts val="0"/>
-                </a:spcAft>
-              </a:pPr>
-              <a:r>
-                <a:rPr sz="979">
-                  <a:solidFill>
-                    <a:srgbClr val="000000">
-                      <a:alpha val="100000"/>
-                    </a:srgbClr>
-                  </a:solidFill>
-                  <a:latin typeface="Helvetica"/>
-                  <a:cs typeface="Helvetica"/>
-                </a:rPr>
-                <a:t>G</a:t>
-              </a:r>
-            </a:p>
-          </p:txBody>
-        </p:sp>
-        <p:sp>
-          <p:nvSpPr>
-            <p:cNvPr id="46" name="tx46"/>
-            <p:cNvSpPr/>
-            <p:nvPr/>
-          </p:nvSpPr>
-          <p:spPr>
-            <a:xfrm>
-              <a:off x="6076006" y="5834415"/>
-              <a:ext cx="562904" cy="127558"/>
-            </a:xfrm>
-            <a:prstGeom prst="rect">
-              <a:avLst/>
-            </a:prstGeom>
-            <a:noFill/>
-          </p:spPr>
-          <p:txBody>
-            <a:bodyPr lIns="0" rIns="0" tIns="0" bIns="0" anchorCtr="1" anchor="ctr" wrap="none"/>
-            <a:lstStyle/>
-            <a:p>
-              <a:pPr algn="l" marL="0" marR="0" indent="0">
-                <a:lnSpc>
-                  <a:spcPts val="1400"/>
-                </a:lnSpc>
-                <a:spcBef>
-                  <a:spcPts val="0"/>
-                </a:spcBef>
-                <a:spcAft>
-                  <a:spcPts val="0"/>
-                </a:spcAft>
-              </a:pPr>
-              <a:r>
-                <a:rPr sz="1400">
-                  <a:solidFill>
-                    <a:srgbClr val="000000">
-                      <a:alpha val="100000"/>
-                    </a:srgbClr>
-                  </a:solidFill>
-                  <a:latin typeface="Helvetica"/>
-                  <a:cs typeface="Helvetica"/>
-                </a:rPr>
-                <a:t>) / CrCl</a:t>
-              </a:r>
-            </a:p>
-          </p:txBody>
-        </p:sp>
-        <p:sp>
-          <p:nvSpPr>
-            <p:cNvPr id="47" name="tx47"/>
-            <p:cNvSpPr/>
-            <p:nvPr/>
-          </p:nvSpPr>
-          <p:spPr>
-            <a:xfrm>
-              <a:off x="6638910" y="5905308"/>
-              <a:ext cx="89885" cy="89245"/>
-            </a:xfrm>
-            <a:prstGeom prst="rect">
-              <a:avLst/>
-            </a:prstGeom>
-            <a:noFill/>
-          </p:spPr>
-          <p:txBody>
-            <a:bodyPr lIns="0" rIns="0" tIns="0" bIns="0" anchorCtr="1" anchor="ctr" wrap="none"/>
-            <a:lstStyle/>
-            <a:p>
-              <a:pPr algn="l" marL="0" marR="0" indent="0">
-                <a:lnSpc>
-                  <a:spcPts val="979"/>
-                </a:lnSpc>
-                <a:spcBef>
-                  <a:spcPts val="0"/>
-                </a:spcBef>
-                <a:spcAft>
-                  <a:spcPts val="0"/>
-                </a:spcAft>
-              </a:pPr>
-              <a:r>
-                <a:rPr sz="979">
-                  <a:solidFill>
-                    <a:srgbClr val="000000">
-                      <a:alpha val="100000"/>
-                    </a:srgbClr>
-                  </a:solidFill>
-                  <a:latin typeface="Helvetica"/>
-                  <a:cs typeface="Helvetica"/>
-                </a:rPr>
-                <a:t>C</a:t>
-              </a:r>
-            </a:p>
-          </p:txBody>
-        </p:sp>
-        <p:sp>
-          <p:nvSpPr>
-            <p:cNvPr id="48" name="tx48"/>
-            <p:cNvSpPr/>
-            <p:nvPr/>
-          </p:nvSpPr>
-          <p:spPr>
-            <a:xfrm>
-              <a:off x="6728796" y="5905308"/>
-              <a:ext cx="96743" cy="89245"/>
-            </a:xfrm>
-            <a:prstGeom prst="rect">
-              <a:avLst/>
-            </a:prstGeom>
-            <a:noFill/>
-          </p:spPr>
-          <p:txBody>
-            <a:bodyPr lIns="0" rIns="0" tIns="0" bIns="0" anchorCtr="1" anchor="ctr" wrap="none"/>
-            <a:lstStyle/>
-            <a:p>
-              <a:pPr algn="l" marL="0" marR="0" indent="0">
-                <a:lnSpc>
-                  <a:spcPts val="979"/>
-                </a:lnSpc>
-                <a:spcBef>
-                  <a:spcPts val="0"/>
-                </a:spcBef>
-                <a:spcAft>
-                  <a:spcPts val="0"/>
-                </a:spcAft>
-              </a:pPr>
-              <a:r>
-                <a:rPr sz="979">
-                  <a:solidFill>
-                    <a:srgbClr val="000000">
-                      <a:alpha val="100000"/>
-                    </a:srgbClr>
-                  </a:solidFill>
-                  <a:latin typeface="Helvetica"/>
-                  <a:cs typeface="Helvetica"/>
-                </a:rPr>
-                <a:t>G</a:t>
-              </a:r>
-            </a:p>
-          </p:txBody>
-        </p:sp>
-        <p:sp>
-          <p:nvSpPr>
-            <p:cNvPr id="49" name="tx49"/>
+            <p:cNvPr id="50" name="tx50"/>
             <p:cNvSpPr/>
             <p:nvPr/>
           </p:nvSpPr>
           <p:spPr>
             <a:xfrm rot="-5400000">
-              <a:off x="-37527" y="3827572"/>
+              <a:off x="-37527" y="3835619"/>
               <a:ext cx="1294150" cy="127558"/>
             </a:xfrm>
             <a:prstGeom prst="rect">
@@ -5635,14 +5654,14 @@
         </p:sp>
         <p:sp>
           <p:nvSpPr>
-            <p:cNvPr id="50" name="tx50"/>
+            <p:cNvPr id="51" name="tx51"/>
             <p:cNvSpPr/>
             <p:nvPr/>
           </p:nvSpPr>
           <p:spPr>
             <a:xfrm>
               <a:off x="915645" y="1977589"/>
-              <a:ext cx="5929701" cy="109362"/>
+              <a:ext cx="3712646" cy="91165"/>
             </a:xfrm>
             <a:prstGeom prst="rect">
               <a:avLst/>
@@ -5655,7 +5674,7 @@
             <a:p>
               <a:pPr algn="l" marL="0" marR="0" indent="0">
                 <a:lnSpc>
-                  <a:spcPts val="1200"/>
+                  <a:spcPts val="1000"/>
                 </a:lnSpc>
                 <a:spcBef>
                   <a:spcPts val="0"/>
@@ -5665,7 +5684,7 @@
                 </a:spcAft>
               </a:pPr>
               <a:r>
-                <a:rPr sz="1200">
+                <a:rPr sz="1000">
                   <a:solidFill>
                     <a:srgbClr val="404040">
                       <a:alpha val="100000"/>
@@ -5674,14 +5693,14 @@
                   <a:latin typeface="Helvetica"/>
                   <a:cs typeface="Helvetica"/>
                 </a:rPr>
-                <a:t>subHR = 0.78 (95% CI 0.61-0.99), p = 0.043   (per 0.1-unit increase in eGFR difference)</a:t>
+                <a:t>subHR = 1.29 (95% CI 1.01-1.65), p = 0.043   (per 10% decrease)</a:t>
               </a:r>
             </a:p>
           </p:txBody>
         </p:sp>
         <p:sp>
           <p:nvSpPr>
-            <p:cNvPr id="51" name="tx51"/>
+            <p:cNvPr id="52" name="tx52"/>
             <p:cNvSpPr/>
             <p:nvPr/>
           </p:nvSpPr>
